--- a/21_September_Monday/02_Seeking_for_AI/02_Seeking_for_AI.pptx
+++ b/21_September_Monday/02_Seeking_for_AI/02_Seeking_for_AI.pptx
@@ -77,7 +77,7 @@
           <a:p>
             <a:pPr algn="ctr"/>
             <a:r>
-              <a:rPr b="0" lang="en-US" sz="4400" strike="noStrike" u="none">
+              <a:rPr b="0" lang="fr-FR" sz="4400" strike="noStrike" u="none">
                 <a:solidFill>
                   <a:srgbClr val="000000"/>
                 </a:solidFill>
@@ -85,9 +85,9 @@
                 <a:uFillTx/>
                 <a:latin typeface="Arial"/>
               </a:rPr>
-              <a:t>Click to move the slide</a:t>
-            </a:r>
-            <a:endParaRPr b="0" lang="en-US" sz="4400" strike="noStrike" u="none">
+              <a:t>Cliquez pour déplacer la diapo</a:t>
+            </a:r>
+            <a:endParaRPr b="0" lang="fr-FR" sz="4400" strike="noStrike" u="none">
               <a:solidFill>
                 <a:srgbClr val="000000"/>
               </a:solidFill>
@@ -130,7 +130,7 @@
               <a:buNone/>
             </a:pPr>
             <a:r>
-              <a:rPr b="0" lang="en-US" sz="2000" strike="noStrike" u="none">
+              <a:rPr b="0" lang="fr-FR" sz="2000" strike="noStrike" u="none">
                 <a:solidFill>
                   <a:srgbClr val="000000"/>
                 </a:solidFill>
@@ -138,9 +138,9 @@
                 <a:uFillTx/>
                 <a:latin typeface="Arial"/>
               </a:rPr>
-              <a:t>Click to edit the notes format</a:t>
-            </a:r>
-            <a:endParaRPr b="0" lang="en-US" sz="2000" strike="noStrike" u="none">
+              <a:t>Cliquez pour modifier le format des notes</a:t>
+            </a:r>
+            <a:endParaRPr b="0" lang="fr-FR" sz="2000" strike="noStrike" u="none">
               <a:solidFill>
                 <a:srgbClr val="000000"/>
               </a:solidFill>
@@ -183,7 +183,7 @@
               <a:buNone/>
             </a:pPr>
             <a:r>
-              <a:rPr b="0" lang="en-US" sz="1400" strike="noStrike" u="none">
+              <a:rPr b="0" lang="fr-FR" sz="1400" strike="noStrike" u="none">
                 <a:solidFill>
                   <a:srgbClr val="000000"/>
                 </a:solidFill>
@@ -191,9 +191,9 @@
                 <a:uFillTx/>
                 <a:latin typeface="Times New Roman"/>
               </a:rPr>
-              <a:t>&lt;header&gt;</a:t>
-            </a:r>
-            <a:endParaRPr b="0" lang="en-US" sz="1400" strike="noStrike" u="none">
+              <a:t>&lt;en-tête&gt;</a:t>
+            </a:r>
+            <a:endParaRPr b="0" lang="fr-FR" sz="1400" strike="noStrike" u="none">
               <a:solidFill>
                 <a:srgbClr val="000000"/>
               </a:solidFill>
@@ -234,7 +234,7 @@
           <a:lstStyle>
             <a:lvl1pPr indent="0" algn="r">
               <a:buNone/>
-              <a:defRPr b="0" lang="en-US" sz="1400" strike="noStrike" u="none">
+              <a:defRPr b="0" lang="fr-FR" sz="1400" strike="noStrike" u="none">
                 <a:solidFill>
                   <a:srgbClr val="000000"/>
                 </a:solidFill>
@@ -249,7 +249,7 @@
               <a:buNone/>
             </a:pPr>
             <a:r>
-              <a:rPr b="0" lang="en-US" sz="1400" strike="noStrike" u="none">
+              <a:rPr b="0" lang="fr-FR" sz="1400" strike="noStrike" u="none">
                 <a:solidFill>
                   <a:srgbClr val="000000"/>
                 </a:solidFill>
@@ -257,9 +257,9 @@
                 <a:uFillTx/>
                 <a:latin typeface="Times New Roman"/>
               </a:rPr>
-              <a:t>&lt;date/time&gt;</a:t>
-            </a:r>
-            <a:endParaRPr b="0" lang="en-US" sz="1400" strike="noStrike" u="none">
+              <a:t>&lt;date/heure&gt;</a:t>
+            </a:r>
+            <a:endParaRPr b="0" lang="fr-FR" sz="1400" strike="noStrike" u="none">
               <a:solidFill>
                 <a:srgbClr val="000000"/>
               </a:solidFill>
@@ -300,7 +300,7 @@
           <a:lstStyle>
             <a:lvl1pPr indent="0">
               <a:buNone/>
-              <a:defRPr b="0" lang="en-US" sz="1400" strike="noStrike" u="none">
+              <a:defRPr b="0" lang="fr-FR" sz="1400" strike="noStrike" u="none">
                 <a:solidFill>
                   <a:srgbClr val="000000"/>
                 </a:solidFill>
@@ -315,7 +315,7 @@
               <a:buNone/>
             </a:pPr>
             <a:r>
-              <a:rPr b="0" lang="en-US" sz="1400" strike="noStrike" u="none">
+              <a:rPr b="0" lang="fr-FR" sz="1400" strike="noStrike" u="none">
                 <a:solidFill>
                   <a:srgbClr val="000000"/>
                 </a:solidFill>
@@ -323,9 +323,9 @@
                 <a:uFillTx/>
                 <a:latin typeface="Times New Roman"/>
               </a:rPr>
-              <a:t>&lt;footer&gt;</a:t>
-            </a:r>
-            <a:endParaRPr b="0" lang="en-US" sz="1400" strike="noStrike" u="none">
+              <a:t>&lt;pied de page&gt;</a:t>
+            </a:r>
+            <a:endParaRPr b="0" lang="fr-FR" sz="1400" strike="noStrike" u="none">
               <a:solidFill>
                 <a:srgbClr val="000000"/>
               </a:solidFill>
@@ -366,7 +366,7 @@
           <a:lstStyle>
             <a:lvl1pPr indent="0" algn="r">
               <a:buNone/>
-              <a:defRPr b="0" lang="en-US" sz="1400" strike="noStrike" u="none">
+              <a:defRPr b="0" lang="fr-FR" sz="1400" strike="noStrike" u="none">
                 <a:solidFill>
                   <a:srgbClr val="000000"/>
                 </a:solidFill>
@@ -380,8 +380,8 @@
             <a:pPr indent="0" algn="r">
               <a:buNone/>
             </a:pPr>
-            <a:fld id="{42F5D849-528E-4EDB-A483-865816AF0A7C}" type="slidenum">
-              <a:rPr b="0" lang="en-US" sz="1400" strike="noStrike" u="none">
+            <a:fld id="{E168E7A8-48A1-4FA9-9A19-B0DDACA7B031}" type="slidenum">
+              <a:rPr b="0" lang="fr-FR" sz="1400" strike="noStrike" u="none">
                 <a:solidFill>
                   <a:srgbClr val="000000"/>
                 </a:solidFill>
@@ -389,9 +389,9 @@
                 <a:uFillTx/>
                 <a:latin typeface="Times New Roman"/>
               </a:rPr>
-              <a:t>&lt;number&gt;</a:t>
+              <a:t>&lt;numéro&gt;</a:t>
             </a:fld>
-            <a:endParaRPr b="0" lang="en-US" sz="1400" strike="noStrike" u="none">
+            <a:endParaRPr b="0" lang="fr-FR" sz="1400" strike="noStrike" u="none">
               <a:solidFill>
                 <a:srgbClr val="000000"/>
               </a:solidFill>
@@ -479,7 +479,7 @@
             <a:pPr indent="0">
               <a:buNone/>
             </a:pPr>
-            <a:endParaRPr b="0" lang="en-US" sz="1800" strike="noStrike" u="none">
+            <a:endParaRPr b="0" lang="fr-FR" sz="1800" strike="noStrike" u="none">
               <a:solidFill>
                 <a:srgbClr val="000000"/>
               </a:solidFill>
@@ -547,7 +547,7 @@
                 <a:tab algn="l" pos="0"/>
               </a:tabLst>
             </a:pPr>
-            <a:fld id="{B97C9940-2745-4AA6-A221-3469B059659A}" type="slidenum">
+            <a:fld id="{8EBBC98B-22B7-4840-9EEC-117454C58929}" type="slidenum">
               <a:rPr b="0" lang="en-US" sz="1800" strike="noStrike" u="none">
                 <a:solidFill>
                   <a:schemeClr val="dk1"/>
@@ -557,9 +557,9 @@
                 <a:latin typeface="+mn-lt"/>
                 <a:ea typeface="+mn-ea"/>
               </a:rPr>
-              <a:t>&lt;number&gt;</a:t>
+              <a:t>&lt;numéro&gt;</a:t>
             </a:fld>
-            <a:endParaRPr b="0" lang="en-US" sz="1800" strike="noStrike" u="none">
+            <a:endParaRPr b="0" lang="fr-FR" sz="1800" strike="noStrike" u="none">
               <a:solidFill>
                 <a:srgbClr val="000000"/>
               </a:solidFill>
@@ -646,7 +646,7 @@
             <a:pPr indent="0">
               <a:buNone/>
             </a:pPr>
-            <a:endParaRPr b="0" lang="en-US" sz="1800" strike="noStrike" u="none">
+            <a:endParaRPr b="0" lang="fr-FR" sz="1800" strike="noStrike" u="none">
               <a:solidFill>
                 <a:srgbClr val="000000"/>
               </a:solidFill>
@@ -714,7 +714,7 @@
                 <a:tab algn="l" pos="0"/>
               </a:tabLst>
             </a:pPr>
-            <a:fld id="{64636EE3-6E7E-4F20-ADBF-CB8CDC7AD785}" type="slidenum">
+            <a:fld id="{D34D1B19-BCA0-46A9-BE15-AB95761E7AFB}" type="slidenum">
               <a:rPr b="0" lang="en-US" sz="1800" strike="noStrike" u="none">
                 <a:solidFill>
                   <a:schemeClr val="dk1"/>
@@ -724,9 +724,9 @@
                 <a:latin typeface="+mn-lt"/>
                 <a:ea typeface="+mn-ea"/>
               </a:rPr>
-              <a:t>&lt;number&gt;</a:t>
+              <a:t>&lt;numéro&gt;</a:t>
             </a:fld>
-            <a:endParaRPr b="0" lang="en-US" sz="1800" strike="noStrike" u="none">
+            <a:endParaRPr b="0" lang="fr-FR" sz="1800" strike="noStrike" u="none">
               <a:solidFill>
                 <a:srgbClr val="000000"/>
               </a:solidFill>
@@ -813,7 +813,7 @@
             <a:pPr indent="0">
               <a:buNone/>
             </a:pPr>
-            <a:endParaRPr b="0" lang="en-US" sz="1800" strike="noStrike" u="none">
+            <a:endParaRPr b="0" lang="fr-FR" sz="1800" strike="noStrike" u="none">
               <a:solidFill>
                 <a:srgbClr val="000000"/>
               </a:solidFill>
@@ -881,7 +881,7 @@
                 <a:tab algn="l" pos="0"/>
               </a:tabLst>
             </a:pPr>
-            <a:fld id="{3CD2F56F-8253-4645-BCF2-9020EEBB8A7C}" type="slidenum">
+            <a:fld id="{BA9243A0-50AD-4A81-A1A3-5A90C35997E5}" type="slidenum">
               <a:rPr b="0" lang="en-US" sz="1800" strike="noStrike" u="none">
                 <a:solidFill>
                   <a:schemeClr val="dk1"/>
@@ -891,9 +891,9 @@
                 <a:latin typeface="+mn-lt"/>
                 <a:ea typeface="+mn-ea"/>
               </a:rPr>
-              <a:t>&lt;number&gt;</a:t>
+              <a:t>&lt;numéro&gt;</a:t>
             </a:fld>
-            <a:endParaRPr b="0" lang="en-US" sz="1800" strike="noStrike" u="none">
+            <a:endParaRPr b="0" lang="fr-FR" sz="1800" strike="noStrike" u="none">
               <a:solidFill>
                 <a:srgbClr val="000000"/>
               </a:solidFill>
@@ -980,7 +980,7 @@
             <a:pPr indent="0">
               <a:buNone/>
             </a:pPr>
-            <a:endParaRPr b="0" lang="en-US" sz="1800" strike="noStrike" u="none">
+            <a:endParaRPr b="0" lang="fr-FR" sz="1800" strike="noStrike" u="none">
               <a:solidFill>
                 <a:srgbClr val="000000"/>
               </a:solidFill>
@@ -1048,7 +1048,7 @@
                 <a:tab algn="l" pos="0"/>
               </a:tabLst>
             </a:pPr>
-            <a:fld id="{6E2BEE70-0C02-4303-92F7-402861C26F21}" type="slidenum">
+            <a:fld id="{7F6B979D-DEE5-416A-8D93-FF0C08CE741B}" type="slidenum">
               <a:rPr b="0" lang="en-US" sz="1800" strike="noStrike" u="none">
                 <a:solidFill>
                   <a:schemeClr val="dk1"/>
@@ -1058,9 +1058,9 @@
                 <a:latin typeface="+mn-lt"/>
                 <a:ea typeface="+mn-ea"/>
               </a:rPr>
-              <a:t>&lt;number&gt;</a:t>
+              <a:t>&lt;numéro&gt;</a:t>
             </a:fld>
-            <a:endParaRPr b="0" lang="en-US" sz="1800" strike="noStrike" u="none">
+            <a:endParaRPr b="0" lang="fr-FR" sz="1800" strike="noStrike" u="none">
               <a:solidFill>
                 <a:srgbClr val="000000"/>
               </a:solidFill>
@@ -1147,7 +1147,7 @@
             <a:pPr indent="0">
               <a:buNone/>
             </a:pPr>
-            <a:endParaRPr b="0" lang="en-US" sz="1800" strike="noStrike" u="none">
+            <a:endParaRPr b="0" lang="fr-FR" sz="1800" strike="noStrike" u="none">
               <a:solidFill>
                 <a:srgbClr val="000000"/>
               </a:solidFill>
@@ -1215,7 +1215,7 @@
                 <a:tab algn="l" pos="0"/>
               </a:tabLst>
             </a:pPr>
-            <a:fld id="{0CD82108-E693-499C-86C4-7BF74DBD361F}" type="slidenum">
+            <a:fld id="{E3DD09C8-6741-42C8-96E8-C323F26ED609}" type="slidenum">
               <a:rPr b="0" lang="en-US" sz="1800" strike="noStrike" u="none">
                 <a:solidFill>
                   <a:schemeClr val="dk1"/>
@@ -1225,9 +1225,9 @@
                 <a:latin typeface="+mn-lt"/>
                 <a:ea typeface="+mn-ea"/>
               </a:rPr>
-              <a:t>&lt;number&gt;</a:t>
+              <a:t>&lt;numéro&gt;</a:t>
             </a:fld>
-            <a:endParaRPr b="0" lang="en-US" sz="1800" strike="noStrike" u="none">
+            <a:endParaRPr b="0" lang="fr-FR" sz="1800" strike="noStrike" u="none">
               <a:solidFill>
                 <a:srgbClr val="000000"/>
               </a:solidFill>
@@ -1314,7 +1314,7 @@
             <a:pPr indent="0">
               <a:buNone/>
             </a:pPr>
-            <a:endParaRPr b="0" lang="en-US" sz="1800" strike="noStrike" u="none">
+            <a:endParaRPr b="0" lang="fr-FR" sz="1800" strike="noStrike" u="none">
               <a:solidFill>
                 <a:srgbClr val="000000"/>
               </a:solidFill>
@@ -1382,7 +1382,7 @@
                 <a:tab algn="l" pos="0"/>
               </a:tabLst>
             </a:pPr>
-            <a:fld id="{FC5F8EE8-D20D-4505-9C18-C05B4EAEC7BA}" type="slidenum">
+            <a:fld id="{32F8B674-9D05-4D5B-9317-5CE9FD926249}" type="slidenum">
               <a:rPr b="0" lang="en-US" sz="1800" strike="noStrike" u="none">
                 <a:solidFill>
                   <a:schemeClr val="dk1"/>
@@ -1392,9 +1392,9 @@
                 <a:latin typeface="+mn-lt"/>
                 <a:ea typeface="+mn-ea"/>
               </a:rPr>
-              <a:t>&lt;number&gt;</a:t>
+              <a:t>&lt;numéro&gt;</a:t>
             </a:fld>
-            <a:endParaRPr b="0" lang="en-US" sz="1800" strike="noStrike" u="none">
+            <a:endParaRPr b="0" lang="fr-FR" sz="1800" strike="noStrike" u="none">
               <a:solidFill>
                 <a:srgbClr val="000000"/>
               </a:solidFill>
@@ -1481,7 +1481,7 @@
             <a:pPr indent="0">
               <a:buNone/>
             </a:pPr>
-            <a:endParaRPr b="0" lang="en-US" sz="1800" strike="noStrike" u="none">
+            <a:endParaRPr b="0" lang="fr-FR" sz="1800" strike="noStrike" u="none">
               <a:solidFill>
                 <a:srgbClr val="000000"/>
               </a:solidFill>
@@ -1549,7 +1549,7 @@
                 <a:tab algn="l" pos="0"/>
               </a:tabLst>
             </a:pPr>
-            <a:fld id="{3096EACA-C2C9-48AE-8AD0-4F251B3C806E}" type="slidenum">
+            <a:fld id="{3DF68067-C16B-4172-A2CE-86C128800FDA}" type="slidenum">
               <a:rPr b="0" lang="en-US" sz="1800" strike="noStrike" u="none">
                 <a:solidFill>
                   <a:schemeClr val="dk1"/>
@@ -1559,9 +1559,9 @@
                 <a:latin typeface="+mn-lt"/>
                 <a:ea typeface="+mn-ea"/>
               </a:rPr>
-              <a:t>&lt;number&gt;</a:t>
+              <a:t>&lt;numéro&gt;</a:t>
             </a:fld>
-            <a:endParaRPr b="0" lang="en-US" sz="1800" strike="noStrike" u="none">
+            <a:endParaRPr b="0" lang="fr-FR" sz="1800" strike="noStrike" u="none">
               <a:solidFill>
                 <a:srgbClr val="000000"/>
               </a:solidFill>
@@ -1648,7 +1648,7 @@
             <a:pPr indent="0">
               <a:buNone/>
             </a:pPr>
-            <a:endParaRPr b="0" lang="en-US" sz="1800" strike="noStrike" u="none">
+            <a:endParaRPr b="0" lang="fr-FR" sz="1800" strike="noStrike" u="none">
               <a:solidFill>
                 <a:srgbClr val="000000"/>
               </a:solidFill>
@@ -1716,7 +1716,7 @@
                 <a:tab algn="l" pos="0"/>
               </a:tabLst>
             </a:pPr>
-            <a:fld id="{888C9D67-2ACD-46F0-AE14-1CA2834F3AEA}" type="slidenum">
+            <a:fld id="{06DBD384-38A5-4C95-A3FC-6A65A8F34D03}" type="slidenum">
               <a:rPr b="0" lang="en-US" sz="1800" strike="noStrike" u="none">
                 <a:solidFill>
                   <a:schemeClr val="dk1"/>
@@ -1726,9 +1726,9 @@
                 <a:latin typeface="+mn-lt"/>
                 <a:ea typeface="+mn-ea"/>
               </a:rPr>
-              <a:t>&lt;number&gt;</a:t>
+              <a:t>&lt;numéro&gt;</a:t>
             </a:fld>
-            <a:endParaRPr b="0" lang="en-US" sz="1800" strike="noStrike" u="none">
+            <a:endParaRPr b="0" lang="fr-FR" sz="1800" strike="noStrike" u="none">
               <a:solidFill>
                 <a:srgbClr val="000000"/>
               </a:solidFill>
@@ -1815,7 +1815,7 @@
             <a:pPr indent="0">
               <a:buNone/>
             </a:pPr>
-            <a:endParaRPr b="0" lang="en-US" sz="1800" strike="noStrike" u="none">
+            <a:endParaRPr b="0" lang="fr-FR" sz="1800" strike="noStrike" u="none">
               <a:solidFill>
                 <a:srgbClr val="000000"/>
               </a:solidFill>
@@ -1883,7 +1883,7 @@
                 <a:tab algn="l" pos="0"/>
               </a:tabLst>
             </a:pPr>
-            <a:fld id="{B4795EC0-7053-4B42-A96E-39DFF0BC8121}" type="slidenum">
+            <a:fld id="{EA61D0EB-45FA-43F5-A42A-9FBC45689AC8}" type="slidenum">
               <a:rPr b="0" lang="en-US" sz="1800" strike="noStrike" u="none">
                 <a:solidFill>
                   <a:schemeClr val="dk1"/>
@@ -1893,9 +1893,9 @@
                 <a:latin typeface="+mn-lt"/>
                 <a:ea typeface="+mn-ea"/>
               </a:rPr>
-              <a:t>&lt;number&gt;</a:t>
+              <a:t>&lt;numéro&gt;</a:t>
             </a:fld>
-            <a:endParaRPr b="0" lang="en-US" sz="1800" strike="noStrike" u="none">
+            <a:endParaRPr b="0" lang="fr-FR" sz="1800" strike="noStrike" u="none">
               <a:solidFill>
                 <a:srgbClr val="000000"/>
               </a:solidFill>
@@ -1982,7 +1982,7 @@
             <a:pPr indent="0">
               <a:buNone/>
             </a:pPr>
-            <a:endParaRPr b="0" lang="en-US" sz="1800" strike="noStrike" u="none">
+            <a:endParaRPr b="0" lang="fr-FR" sz="1800" strike="noStrike" u="none">
               <a:solidFill>
                 <a:srgbClr val="000000"/>
               </a:solidFill>
@@ -2050,7 +2050,7 @@
                 <a:tab algn="l" pos="0"/>
               </a:tabLst>
             </a:pPr>
-            <a:fld id="{6682C3A2-88B0-460F-9D4C-A14BC7D95A8F}" type="slidenum">
+            <a:fld id="{1BB7C9C3-CBA6-437E-A8C5-01DEDB00205E}" type="slidenum">
               <a:rPr b="0" lang="en-US" sz="1800" strike="noStrike" u="none">
                 <a:solidFill>
                   <a:schemeClr val="dk1"/>
@@ -2060,9 +2060,9 @@
                 <a:latin typeface="+mn-lt"/>
                 <a:ea typeface="+mn-ea"/>
               </a:rPr>
-              <a:t>&lt;number&gt;</a:t>
+              <a:t>&lt;numéro&gt;</a:t>
             </a:fld>
-            <a:endParaRPr b="0" lang="en-US" sz="1800" strike="noStrike" u="none">
+            <a:endParaRPr b="0" lang="fr-FR" sz="1800" strike="noStrike" u="none">
               <a:solidFill>
                 <a:srgbClr val="000000"/>
               </a:solidFill>
@@ -2111,7 +2111,7 @@
         <p:spPr>
           <a:xfrm>
             <a:off x="548640" y="6446880"/>
-            <a:ext cx="6399360" cy="272880"/>
+            <a:ext cx="6399000" cy="272520"/>
           </a:xfrm>
           <a:prstGeom prst="rect">
             <a:avLst/>
@@ -2152,7 +2152,7 @@
               </a:rPr>
               <a:t>Seeking for AI</a:t>
             </a:r>
-            <a:endParaRPr b="0" lang="en-US" sz="900" strike="noStrike" u="none">
+            <a:endParaRPr b="0" lang="fr-FR" sz="900" strike="noStrike" u="none">
               <a:solidFill>
                 <a:srgbClr val="000000"/>
               </a:solidFill>
@@ -2172,7 +2172,7 @@
         <p:spPr>
           <a:xfrm>
             <a:off x="11185920" y="6446880"/>
-            <a:ext cx="455760" cy="272880"/>
+            <a:ext cx="455400" cy="272520"/>
           </a:xfrm>
           <a:prstGeom prst="rect">
             <a:avLst/>
@@ -2213,7 +2213,7 @@
               </a:rPr>
               <a:t>2</a:t>
             </a:r>
-            <a:endParaRPr b="0" lang="en-US" sz="900" strike="noStrike" u="none">
+            <a:endParaRPr b="0" lang="fr-FR" sz="900" strike="noStrike" u="none">
               <a:solidFill>
                 <a:srgbClr val="000000"/>
               </a:solidFill>
@@ -2238,7 +2238,7 @@
         <p:spPr>
           <a:xfrm>
             <a:off x="10375920" y="356040"/>
-            <a:ext cx="1268640" cy="650160"/>
+            <a:ext cx="1268280" cy="649800"/>
           </a:xfrm>
           <a:prstGeom prst="rect">
             <a:avLst/>
@@ -2262,7 +2262,7 @@
         <p:spPr>
           <a:xfrm>
             <a:off x="609480" y="273600"/>
-            <a:ext cx="10972080" cy="1144440"/>
+            <a:ext cx="10971720" cy="1144080"/>
           </a:xfrm>
           <a:prstGeom prst="rect">
             <a:avLst/>
@@ -2297,7 +2297,7 @@
               </a:rPr>
               <a:t>Click to edit the title text format</a:t>
             </a:r>
-            <a:endParaRPr b="0" lang="en-US" sz="4400" strike="noStrike" u="none">
+            <a:endParaRPr b="0" lang="fr-FR" sz="4400" strike="noStrike" u="none">
               <a:solidFill>
                 <a:srgbClr val="000000"/>
               </a:solidFill>
@@ -2321,7 +2321,7 @@
         <p:spPr>
           <a:xfrm>
             <a:off x="609480" y="1604520"/>
-            <a:ext cx="10972080" cy="3976920"/>
+            <a:ext cx="10971720" cy="3976560"/>
           </a:xfrm>
           <a:prstGeom prst="rect">
             <a:avLst/>
@@ -2361,7 +2361,7 @@
               </a:rPr>
               <a:t>Click to edit the outline text format</a:t>
             </a:r>
-            <a:endParaRPr b="0" lang="en-US" sz="3200" strike="noStrike" u="none">
+            <a:endParaRPr b="0" lang="fr-FR" sz="3200" strike="noStrike" u="none">
               <a:solidFill>
                 <a:srgbClr val="000000"/>
               </a:solidFill>
@@ -2396,7 +2396,7 @@
               </a:rPr>
               <a:t>Second Outline Level</a:t>
             </a:r>
-            <a:endParaRPr b="0" lang="en-US" sz="2800" strike="noStrike" u="none">
+            <a:endParaRPr b="0" lang="fr-FR" sz="2800" strike="noStrike" u="none">
               <a:solidFill>
                 <a:srgbClr val="000000"/>
               </a:solidFill>
@@ -2431,7 +2431,7 @@
               </a:rPr>
               <a:t>Third Outline Level</a:t>
             </a:r>
-            <a:endParaRPr b="0" lang="en-US" sz="2400" strike="noStrike" u="none">
+            <a:endParaRPr b="0" lang="fr-FR" sz="2400" strike="noStrike" u="none">
               <a:solidFill>
                 <a:srgbClr val="000000"/>
               </a:solidFill>
@@ -2466,7 +2466,7 @@
               </a:rPr>
               <a:t>Fourth Outline Level</a:t>
             </a:r>
-            <a:endParaRPr b="0" lang="en-US" sz="2000" strike="noStrike" u="none">
+            <a:endParaRPr b="0" lang="fr-FR" sz="2000" strike="noStrike" u="none">
               <a:solidFill>
                 <a:srgbClr val="000000"/>
               </a:solidFill>
@@ -2501,7 +2501,7 @@
               </a:rPr>
               <a:t>Fifth Outline Level</a:t>
             </a:r>
-            <a:endParaRPr b="0" lang="en-US" sz="2000" strike="noStrike" u="none">
+            <a:endParaRPr b="0" lang="fr-FR" sz="2000" strike="noStrike" u="none">
               <a:solidFill>
                 <a:srgbClr val="000000"/>
               </a:solidFill>
@@ -2536,7 +2536,7 @@
               </a:rPr>
               <a:t>Sixth Outline Level</a:t>
             </a:r>
-            <a:endParaRPr b="0" lang="en-US" sz="2000" strike="noStrike" u="none">
+            <a:endParaRPr b="0" lang="fr-FR" sz="2000" strike="noStrike" u="none">
               <a:solidFill>
                 <a:srgbClr val="000000"/>
               </a:solidFill>
@@ -2571,7 +2571,7 @@
               </a:rPr>
               <a:t>Seventh Outline Level</a:t>
             </a:r>
-            <a:endParaRPr b="0" lang="en-US" sz="2000" strike="noStrike" u="none">
+            <a:endParaRPr b="0" lang="fr-FR" sz="2000" strike="noStrike" u="none">
               <a:solidFill>
                 <a:srgbClr val="000000"/>
               </a:solidFill>
@@ -2620,7 +2620,7 @@
         <p:spPr>
           <a:xfrm>
             <a:off x="548640" y="6446880"/>
-            <a:ext cx="6399360" cy="272880"/>
+            <a:ext cx="6399000" cy="272520"/>
           </a:xfrm>
           <a:prstGeom prst="rect">
             <a:avLst/>
@@ -2661,7 +2661,7 @@
               </a:rPr>
               <a:t>Seeking for AI</a:t>
             </a:r>
-            <a:endParaRPr b="0" lang="en-US" sz="900" strike="noStrike" u="none">
+            <a:endParaRPr b="0" lang="fr-FR" sz="900" strike="noStrike" u="none">
               <a:solidFill>
                 <a:srgbClr val="000000"/>
               </a:solidFill>
@@ -2681,7 +2681,7 @@
         <p:spPr>
           <a:xfrm>
             <a:off x="11185920" y="6446880"/>
-            <a:ext cx="455760" cy="272880"/>
+            <a:ext cx="455400" cy="272520"/>
           </a:xfrm>
           <a:prstGeom prst="rect">
             <a:avLst/>
@@ -2722,7 +2722,7 @@
               </a:rPr>
               <a:t>2</a:t>
             </a:r>
-            <a:endParaRPr b="0" lang="en-US" sz="900" strike="noStrike" u="none">
+            <a:endParaRPr b="0" lang="fr-FR" sz="900" strike="noStrike" u="none">
               <a:solidFill>
                 <a:srgbClr val="000000"/>
               </a:solidFill>
@@ -2747,7 +2747,7 @@
         <p:spPr>
           <a:xfrm>
             <a:off x="10375920" y="356040"/>
-            <a:ext cx="1268640" cy="650160"/>
+            <a:ext cx="1268280" cy="649800"/>
           </a:xfrm>
           <a:prstGeom prst="rect">
             <a:avLst/>
@@ -2771,7 +2771,7 @@
         <p:spPr>
           <a:xfrm>
             <a:off x="609480" y="273600"/>
-            <a:ext cx="10972080" cy="1144440"/>
+            <a:ext cx="10971720" cy="1144080"/>
           </a:xfrm>
           <a:prstGeom prst="rect">
             <a:avLst/>
@@ -2806,7 +2806,7 @@
               </a:rPr>
               <a:t>Click to edit the title text format</a:t>
             </a:r>
-            <a:endParaRPr b="0" lang="en-US" sz="4400" strike="noStrike" u="none">
+            <a:endParaRPr b="0" lang="fr-FR" sz="4400" strike="noStrike" u="none">
               <a:solidFill>
                 <a:srgbClr val="000000"/>
               </a:solidFill>
@@ -2830,7 +2830,7 @@
         <p:spPr>
           <a:xfrm>
             <a:off x="609480" y="1604520"/>
-            <a:ext cx="10972080" cy="3976920"/>
+            <a:ext cx="10971720" cy="3976560"/>
           </a:xfrm>
           <a:prstGeom prst="rect">
             <a:avLst/>
@@ -2870,7 +2870,7 @@
               </a:rPr>
               <a:t>Click to edit the outline text format</a:t>
             </a:r>
-            <a:endParaRPr b="0" lang="en-US" sz="3200" strike="noStrike" u="none">
+            <a:endParaRPr b="0" lang="fr-FR" sz="3200" strike="noStrike" u="none">
               <a:solidFill>
                 <a:srgbClr val="000000"/>
               </a:solidFill>
@@ -2905,7 +2905,7 @@
               </a:rPr>
               <a:t>Second Outline Level</a:t>
             </a:r>
-            <a:endParaRPr b="0" lang="en-US" sz="2800" strike="noStrike" u="none">
+            <a:endParaRPr b="0" lang="fr-FR" sz="2800" strike="noStrike" u="none">
               <a:solidFill>
                 <a:srgbClr val="000000"/>
               </a:solidFill>
@@ -2940,7 +2940,7 @@
               </a:rPr>
               <a:t>Third Outline Level</a:t>
             </a:r>
-            <a:endParaRPr b="0" lang="en-US" sz="2400" strike="noStrike" u="none">
+            <a:endParaRPr b="0" lang="fr-FR" sz="2400" strike="noStrike" u="none">
               <a:solidFill>
                 <a:srgbClr val="000000"/>
               </a:solidFill>
@@ -2975,7 +2975,7 @@
               </a:rPr>
               <a:t>Fourth Outline Level</a:t>
             </a:r>
-            <a:endParaRPr b="0" lang="en-US" sz="2000" strike="noStrike" u="none">
+            <a:endParaRPr b="0" lang="fr-FR" sz="2000" strike="noStrike" u="none">
               <a:solidFill>
                 <a:srgbClr val="000000"/>
               </a:solidFill>
@@ -3010,7 +3010,7 @@
               </a:rPr>
               <a:t>Fifth Outline Level</a:t>
             </a:r>
-            <a:endParaRPr b="0" lang="en-US" sz="2000" strike="noStrike" u="none">
+            <a:endParaRPr b="0" lang="fr-FR" sz="2000" strike="noStrike" u="none">
               <a:solidFill>
                 <a:srgbClr val="000000"/>
               </a:solidFill>
@@ -3045,7 +3045,7 @@
               </a:rPr>
               <a:t>Sixth Outline Level</a:t>
             </a:r>
-            <a:endParaRPr b="0" lang="en-US" sz="2000" strike="noStrike" u="none">
+            <a:endParaRPr b="0" lang="fr-FR" sz="2000" strike="noStrike" u="none">
               <a:solidFill>
                 <a:srgbClr val="000000"/>
               </a:solidFill>
@@ -3080,7 +3080,7 @@
               </a:rPr>
               <a:t>Seventh Outline Level</a:t>
             </a:r>
-            <a:endParaRPr b="0" lang="en-US" sz="2000" strike="noStrike" u="none">
+            <a:endParaRPr b="0" lang="fr-FR" sz="2000" strike="noStrike" u="none">
               <a:solidFill>
                 <a:srgbClr val="000000"/>
               </a:solidFill>
@@ -3129,7 +3129,7 @@
         <p:spPr>
           <a:xfrm>
             <a:off x="548640" y="6446880"/>
-            <a:ext cx="6399360" cy="272880"/>
+            <a:ext cx="6399000" cy="272520"/>
           </a:xfrm>
           <a:prstGeom prst="rect">
             <a:avLst/>
@@ -3170,7 +3170,7 @@
               </a:rPr>
               <a:t>Seeking for AI</a:t>
             </a:r>
-            <a:endParaRPr b="0" lang="en-US" sz="900" strike="noStrike" u="none">
+            <a:endParaRPr b="0" lang="fr-FR" sz="900" strike="noStrike" u="none">
               <a:solidFill>
                 <a:srgbClr val="000000"/>
               </a:solidFill>
@@ -3190,7 +3190,7 @@
         <p:spPr>
           <a:xfrm>
             <a:off x="11185920" y="6446880"/>
-            <a:ext cx="455760" cy="272880"/>
+            <a:ext cx="455400" cy="272520"/>
           </a:xfrm>
           <a:prstGeom prst="rect">
             <a:avLst/>
@@ -3231,7 +3231,7 @@
               </a:rPr>
               <a:t>2</a:t>
             </a:r>
-            <a:endParaRPr b="0" lang="en-US" sz="900" strike="noStrike" u="none">
+            <a:endParaRPr b="0" lang="fr-FR" sz="900" strike="noStrike" u="none">
               <a:solidFill>
                 <a:srgbClr val="000000"/>
               </a:solidFill>
@@ -3256,7 +3256,7 @@
         <p:spPr>
           <a:xfrm>
             <a:off x="10375920" y="356040"/>
-            <a:ext cx="1268640" cy="650160"/>
+            <a:ext cx="1268280" cy="649800"/>
           </a:xfrm>
           <a:prstGeom prst="rect">
             <a:avLst/>
@@ -3280,7 +3280,7 @@
         <p:spPr>
           <a:xfrm>
             <a:off x="609480" y="273600"/>
-            <a:ext cx="10972080" cy="1144440"/>
+            <a:ext cx="10971720" cy="1144080"/>
           </a:xfrm>
           <a:prstGeom prst="rect">
             <a:avLst/>
@@ -3315,7 +3315,7 @@
               </a:rPr>
               <a:t>Click to edit the title text format</a:t>
             </a:r>
-            <a:endParaRPr b="0" lang="en-US" sz="4400" strike="noStrike" u="none">
+            <a:endParaRPr b="0" lang="fr-FR" sz="4400" strike="noStrike" u="none">
               <a:solidFill>
                 <a:srgbClr val="000000"/>
               </a:solidFill>
@@ -3339,7 +3339,7 @@
         <p:spPr>
           <a:xfrm>
             <a:off x="609480" y="1604520"/>
-            <a:ext cx="10972080" cy="3976920"/>
+            <a:ext cx="10971720" cy="3976560"/>
           </a:xfrm>
           <a:prstGeom prst="rect">
             <a:avLst/>
@@ -3379,7 +3379,7 @@
               </a:rPr>
               <a:t>Click to edit the outline text format</a:t>
             </a:r>
-            <a:endParaRPr b="0" lang="en-US" sz="3200" strike="noStrike" u="none">
+            <a:endParaRPr b="0" lang="fr-FR" sz="3200" strike="noStrike" u="none">
               <a:solidFill>
                 <a:srgbClr val="000000"/>
               </a:solidFill>
@@ -3414,7 +3414,7 @@
               </a:rPr>
               <a:t>Second Outline Level</a:t>
             </a:r>
-            <a:endParaRPr b="0" lang="en-US" sz="2800" strike="noStrike" u="none">
+            <a:endParaRPr b="0" lang="fr-FR" sz="2800" strike="noStrike" u="none">
               <a:solidFill>
                 <a:srgbClr val="000000"/>
               </a:solidFill>
@@ -3449,7 +3449,7 @@
               </a:rPr>
               <a:t>Third Outline Level</a:t>
             </a:r>
-            <a:endParaRPr b="0" lang="en-US" sz="2400" strike="noStrike" u="none">
+            <a:endParaRPr b="0" lang="fr-FR" sz="2400" strike="noStrike" u="none">
               <a:solidFill>
                 <a:srgbClr val="000000"/>
               </a:solidFill>
@@ -3484,7 +3484,7 @@
               </a:rPr>
               <a:t>Fourth Outline Level</a:t>
             </a:r>
-            <a:endParaRPr b="0" lang="en-US" sz="2000" strike="noStrike" u="none">
+            <a:endParaRPr b="0" lang="fr-FR" sz="2000" strike="noStrike" u="none">
               <a:solidFill>
                 <a:srgbClr val="000000"/>
               </a:solidFill>
@@ -3519,7 +3519,7 @@
               </a:rPr>
               <a:t>Fifth Outline Level</a:t>
             </a:r>
-            <a:endParaRPr b="0" lang="en-US" sz="2000" strike="noStrike" u="none">
+            <a:endParaRPr b="0" lang="fr-FR" sz="2000" strike="noStrike" u="none">
               <a:solidFill>
                 <a:srgbClr val="000000"/>
               </a:solidFill>
@@ -3554,7 +3554,7 @@
               </a:rPr>
               <a:t>Sixth Outline Level</a:t>
             </a:r>
-            <a:endParaRPr b="0" lang="en-US" sz="2000" strike="noStrike" u="none">
+            <a:endParaRPr b="0" lang="fr-FR" sz="2000" strike="noStrike" u="none">
               <a:solidFill>
                 <a:srgbClr val="000000"/>
               </a:solidFill>
@@ -3589,7 +3589,7 @@
               </a:rPr>
               <a:t>Seventh Outline Level</a:t>
             </a:r>
-            <a:endParaRPr b="0" lang="en-US" sz="2000" strike="noStrike" u="none">
+            <a:endParaRPr b="0" lang="fr-FR" sz="2000" strike="noStrike" u="none">
               <a:solidFill>
                 <a:srgbClr val="000000"/>
               </a:solidFill>
@@ -3666,7 +3666,7 @@
         <p:spPr>
           <a:xfrm>
             <a:off x="9392760" y="-1425960"/>
-            <a:ext cx="4753440" cy="4753440"/>
+            <a:ext cx="4753080" cy="4753080"/>
           </a:xfrm>
           <a:prstGeom prst="ellipse">
             <a:avLst/>
@@ -3714,7 +3714,7 @@
         <p:spPr>
           <a:xfrm>
             <a:off x="-1828800" y="4206240"/>
-            <a:ext cx="4204800" cy="4204800"/>
+            <a:ext cx="4204440" cy="4204440"/>
           </a:xfrm>
           <a:prstGeom prst="ellipse">
             <a:avLst/>
@@ -3762,7 +3762,7 @@
         <p:spPr>
           <a:xfrm>
             <a:off x="777240" y="1828800"/>
-            <a:ext cx="10514160" cy="1553040"/>
+            <a:ext cx="10513800" cy="1552680"/>
           </a:xfrm>
           <a:prstGeom prst="rect">
             <a:avLst/>
@@ -3803,7 +3803,7 @@
               </a:rPr>
               <a:t>Seeking for AI</a:t>
             </a:r>
-            <a:endParaRPr b="0" lang="en-US" sz="5400" strike="noStrike" u="none">
+            <a:endParaRPr b="0" lang="fr-FR" sz="5400" strike="noStrike" u="none">
               <a:solidFill>
                 <a:srgbClr val="ffffff"/>
               </a:solidFill>
@@ -3823,7 +3823,7 @@
         <p:spPr>
           <a:xfrm>
             <a:off x="822960" y="3246120"/>
-            <a:ext cx="6348600" cy="547200"/>
+            <a:ext cx="6348240" cy="546840"/>
           </a:xfrm>
           <a:prstGeom prst="rect">
             <a:avLst/>
@@ -3870,7 +3870,7 @@
               </a:rPr>
               <a:t>Realistic Datasets for Photons and Neutrons AI methodologies</a:t>
             </a:r>
-            <a:endParaRPr b="0" lang="en-US" sz="1900" strike="noStrike" u="none">
+            <a:endParaRPr b="0" lang="fr-FR" sz="1900" strike="noStrike" u="none">
               <a:solidFill>
                 <a:srgbClr val="ffffff"/>
               </a:solidFill>
@@ -3890,7 +3890,7 @@
         <p:spPr>
           <a:xfrm>
             <a:off x="822960" y="4160520"/>
-            <a:ext cx="1415880" cy="309600"/>
+            <a:ext cx="1415520" cy="309240"/>
           </a:xfrm>
           <a:prstGeom prst="roundRect">
             <a:avLst>
@@ -3940,7 +3940,7 @@
         <p:spPr>
           <a:xfrm>
             <a:off x="822960" y="4160520"/>
-            <a:ext cx="1415880" cy="309600"/>
+            <a:ext cx="1415520" cy="309240"/>
           </a:xfrm>
           <a:prstGeom prst="rect">
             <a:avLst/>
@@ -3981,7 +3981,7 @@
               </a:rPr>
               <a:t>McStas — neutrons</a:t>
             </a:r>
-            <a:endParaRPr b="0" lang="en-US" sz="1100" strike="noStrike" u="none">
+            <a:endParaRPr b="0" lang="fr-FR" sz="1100" strike="noStrike" u="none">
               <a:solidFill>
                 <a:srgbClr val="ffffff"/>
               </a:solidFill>
@@ -4001,7 +4001,7 @@
         <p:spPr>
           <a:xfrm>
             <a:off x="2377440" y="4160520"/>
-            <a:ext cx="1415880" cy="309600"/>
+            <a:ext cx="1415520" cy="309240"/>
           </a:xfrm>
           <a:prstGeom prst="roundRect">
             <a:avLst>
@@ -4051,7 +4051,7 @@
         <p:spPr>
           <a:xfrm>
             <a:off x="2377440" y="4160520"/>
-            <a:ext cx="1415880" cy="309600"/>
+            <a:ext cx="1415520" cy="309240"/>
           </a:xfrm>
           <a:prstGeom prst="rect">
             <a:avLst/>
@@ -4092,7 +4092,7 @@
               </a:rPr>
               <a:t>McXtrace — X-rays</a:t>
             </a:r>
-            <a:endParaRPr b="0" lang="en-US" sz="1100" strike="noStrike" u="none">
+            <a:endParaRPr b="0" lang="fr-FR" sz="1100" strike="noStrike" u="none">
               <a:solidFill>
                 <a:srgbClr val="ffffff"/>
               </a:solidFill>
@@ -4155,7 +4155,7 @@
         <p:spPr>
           <a:xfrm>
             <a:off x="822960" y="5897880"/>
-            <a:ext cx="5484960" cy="318600"/>
+            <a:ext cx="5484600" cy="318240"/>
           </a:xfrm>
           <a:prstGeom prst="rect">
             <a:avLst/>
@@ -4196,7 +4196,7 @@
               </a:rPr>
               <a:t>Emmanuel FARHI   ·   Synchrotron SOLEIL – Sept 2026</a:t>
             </a:r>
-            <a:endParaRPr b="0" lang="en-US" sz="1250" strike="noStrike" u="none">
+            <a:endParaRPr b="0" lang="fr-FR" sz="1250" strike="noStrike" u="none">
               <a:solidFill>
                 <a:srgbClr val="ffffff"/>
               </a:solidFill>
@@ -4216,7 +4216,7 @@
         <p:spPr>
           <a:xfrm>
             <a:off x="7429680" y="3759120"/>
-            <a:ext cx="3808440" cy="1497240"/>
+            <a:ext cx="3808080" cy="1496880"/>
           </a:xfrm>
           <a:prstGeom prst="roundRect">
             <a:avLst>
@@ -4274,7 +4274,7 @@
         <p:spPr>
           <a:xfrm>
             <a:off x="7429680" y="5384880"/>
-            <a:ext cx="3808440" cy="277920"/>
+            <a:ext cx="3808080" cy="277560"/>
           </a:xfrm>
           <a:prstGeom prst="rect">
             <a:avLst/>
@@ -4311,7 +4311,7 @@
               </a:rPr>
               <a:t>PaNRAID School  ·  supported by PEPR DIADEM</a:t>
             </a:r>
-            <a:endParaRPr b="0" lang="en-US" sz="1300" strike="noStrike" u="none">
+            <a:endParaRPr b="0" lang="fr-FR" sz="1300" strike="noStrike" u="none">
               <a:solidFill>
                 <a:srgbClr val="ffffff"/>
               </a:solidFill>
@@ -4336,7 +4336,7 @@
         <p:spPr>
           <a:xfrm>
             <a:off x="825480" y="457200"/>
-            <a:ext cx="1395720" cy="715680"/>
+            <a:ext cx="1395360" cy="715320"/>
           </a:xfrm>
           <a:prstGeom prst="rect">
             <a:avLst/>
@@ -4360,7 +4360,7 @@
         <p:spPr>
           <a:xfrm>
             <a:off x="7429680" y="478800"/>
-            <a:ext cx="4538160" cy="672120"/>
+            <a:ext cx="4537800" cy="671760"/>
           </a:xfrm>
           <a:prstGeom prst="rect">
             <a:avLst/>
@@ -4380,9 +4380,9 @@
         <p:grpSpPr>
           <a:xfrm>
             <a:off x="7936200" y="3847680"/>
-            <a:ext cx="2795040" cy="1320120"/>
+            <a:ext cx="2794680" cy="1319760"/>
             <a:chOff x="7936200" y="3847680"/>
-            <a:chExt cx="2795040" cy="1320120"/>
+            <a:chExt cx="2794680" cy="1319760"/>
           </a:xfrm>
         </p:grpSpPr>
         <p:grpSp>
@@ -4394,9 +4394,9 @@
           <p:grpSpPr>
             <a:xfrm>
               <a:off x="9343440" y="3847680"/>
-              <a:ext cx="1387800" cy="1257120"/>
+              <a:ext cx="1387440" cy="1256760"/>
               <a:chOff x="9343440" y="3847680"/>
-              <a:chExt cx="1387800" cy="1257120"/>
+              <a:chExt cx="1387440" cy="1256760"/>
             </a:xfrm>
           </p:grpSpPr>
           <p:pic>
@@ -4413,7 +4413,7 @@
             <p:spPr>
               <a:xfrm>
                 <a:off x="9392760" y="3847680"/>
-                <a:ext cx="1293120" cy="774720"/>
+                <a:ext cx="1292760" cy="774360"/>
               </a:xfrm>
               <a:prstGeom prst="rect">
                 <a:avLst/>
@@ -4437,7 +4437,7 @@
             <p:spPr>
               <a:xfrm>
                 <a:off x="9343440" y="4576320"/>
-                <a:ext cx="961920" cy="464040"/>
+                <a:ext cx="961560" cy="463680"/>
               </a:xfrm>
               <a:prstGeom prst="rect">
                 <a:avLst/>
@@ -4461,7 +4461,7 @@
             <p:spPr>
               <a:xfrm>
                 <a:off x="10378800" y="4584960"/>
-                <a:ext cx="352440" cy="519840"/>
+                <a:ext cx="352080" cy="519480"/>
               </a:xfrm>
               <a:prstGeom prst="rect">
                 <a:avLst/>
@@ -4486,7 +4486,7 @@
           <p:spPr>
             <a:xfrm>
               <a:off x="7936200" y="3852360"/>
-              <a:ext cx="1293120" cy="1315440"/>
+              <a:ext cx="1292760" cy="1315080"/>
             </a:xfrm>
             <a:prstGeom prst="rect">
               <a:avLst/>
@@ -4537,7 +4537,7 @@
         <p:spPr>
           <a:xfrm>
             <a:off x="548640" y="384120"/>
-            <a:ext cx="9142560" cy="291240"/>
+            <a:ext cx="9142200" cy="290880"/>
           </a:xfrm>
           <a:prstGeom prst="rect">
             <a:avLst/>
@@ -4583,7 +4583,7 @@
               </a:rPr>
               <a:t>General AI Methodology</a:t>
             </a:r>
-            <a:endParaRPr b="0" lang="en-US" sz="1200" strike="noStrike" u="none">
+            <a:endParaRPr b="0" lang="fr-FR" sz="1200" strike="noStrike" u="none">
               <a:solidFill>
                 <a:srgbClr val="000000"/>
               </a:solidFill>
@@ -4603,7 +4603,7 @@
         <p:spPr>
           <a:xfrm>
             <a:off x="548640" y="658440"/>
-            <a:ext cx="11062800" cy="821520"/>
+            <a:ext cx="11062440" cy="821160"/>
           </a:xfrm>
           <a:prstGeom prst="rect">
             <a:avLst/>
@@ -4649,7 +4649,7 @@
               </a:rPr>
               <a:t>General AI Methodology</a:t>
             </a:r>
-            <a:endParaRPr b="0" lang="en-US" sz="3000" strike="noStrike" u="none">
+            <a:endParaRPr b="0" lang="fr-FR" sz="3000" strike="noStrike" u="none">
               <a:solidFill>
                 <a:srgbClr val="000000"/>
               </a:solidFill>
@@ -4669,7 +4669,7 @@
         <p:spPr>
           <a:xfrm>
             <a:off x="11185920" y="6446520"/>
-            <a:ext cx="455760" cy="272880"/>
+            <a:ext cx="455400" cy="272520"/>
           </a:xfrm>
           <a:prstGeom prst="rect">
             <a:avLst/>
@@ -4710,7 +4710,7 @@
               </a:rPr>
               <a:t>2</a:t>
             </a:r>
-            <a:endParaRPr b="0" lang="en-US" sz="900" strike="noStrike" u="none">
+            <a:endParaRPr b="0" lang="fr-FR" sz="900" strike="noStrike" u="none">
               <a:solidFill>
                 <a:srgbClr val="000000"/>
               </a:solidFill>
@@ -4730,7 +4730,7 @@
         <p:spPr>
           <a:xfrm>
             <a:off x="540000" y="1800000"/>
-            <a:ext cx="10979280" cy="4604760"/>
+            <a:ext cx="10978920" cy="4604760"/>
           </a:xfrm>
           <a:prstGeom prst="rect">
             <a:avLst/>
@@ -4792,7 +4792,7 @@
               </a:rPr>
               <a:t>:</a:t>
             </a:r>
-            <a:endParaRPr b="0" lang="en-US" sz="2400" strike="noStrike" u="none">
+            <a:endParaRPr b="0" lang="fr-FR" sz="2400" strike="noStrike" u="none">
               <a:solidFill>
                 <a:srgbClr val="000000"/>
               </a:solidFill>
@@ -4840,14 +4840,13 @@
               </a:rPr>
               <a:t> </a:t>
             </a:r>
-            <a:endParaRPr b="0" lang="en-US" sz="2400" strike="noStrike" u="none">
-              <a:solidFill>
-                <a:srgbClr val="000000"/>
-              </a:solidFill>
-              <a:effectLst/>
-              <a:uFillTx/>
-              <a:latin typeface="Arial"/>
-              <a:ea typeface="Unifont"/>
+            <a:endParaRPr b="0" lang="fr-FR" sz="2400" strike="noStrike" u="none">
+              <a:solidFill>
+                <a:srgbClr val="000000"/>
+              </a:solidFill>
+              <a:effectLst/>
+              <a:uFillTx/>
+              <a:latin typeface="Arial"/>
             </a:endParaRPr>
           </a:p>
           <a:p>
@@ -4873,14 +4872,13 @@
             <a:br>
               <a:rPr sz="2400"/>
             </a:br>
-            <a:endParaRPr b="0" lang="en-US" sz="2400" strike="noStrike" u="none">
-              <a:solidFill>
-                <a:srgbClr val="000000"/>
-              </a:solidFill>
-              <a:effectLst/>
-              <a:uFillTx/>
-              <a:latin typeface="Arial"/>
-              <a:ea typeface="Unifont"/>
+            <a:endParaRPr b="0" lang="fr-FR" sz="2400" strike="noStrike" u="none">
+              <a:solidFill>
+                <a:srgbClr val="000000"/>
+              </a:solidFill>
+              <a:effectLst/>
+              <a:uFillTx/>
+              <a:latin typeface="Arial"/>
             </a:endParaRPr>
           </a:p>
           <a:p>
@@ -4905,6 +4903,7 @@
                 <a:effectLst/>
                 <a:uFillTx/>
                 <a:latin typeface="Calibri"/>
+                <a:ea typeface="Unifont"/>
               </a:rPr>
               <a:t>Universal Approximation Theorem</a:t>
             </a:r>
@@ -4916,6 +4915,7 @@
                 <a:effectLst/>
                 <a:uFillTx/>
                 <a:latin typeface="Calibri"/>
+                <a:ea typeface="Unifont"/>
               </a:rPr>
               <a:t>: A neural network can </a:t>
             </a:r>
@@ -4927,6 +4927,7 @@
                 <a:effectLst/>
                 <a:uFillTx/>
                 <a:latin typeface="Calibri"/>
+                <a:ea typeface="Unifont"/>
               </a:rPr>
               <a:t>approximate</a:t>
             </a:r>
@@ -4938,6 +4939,7 @@
                 <a:effectLst/>
                 <a:uFillTx/>
                 <a:latin typeface="Calibri"/>
+                <a:ea typeface="Unifont"/>
               </a:rPr>
               <a:t> </a:t>
             </a:r>
@@ -4949,6 +4951,7 @@
                 <a:effectLst/>
                 <a:uFillTx/>
                 <a:latin typeface="Calibri"/>
+                <a:ea typeface="Unifont"/>
               </a:rPr>
               <a:t>any continuous function</a:t>
             </a:r>
@@ -4960,6 +4963,7 @@
                 <a:effectLst/>
                 <a:uFillTx/>
                 <a:latin typeface="Calibri"/>
+                <a:ea typeface="Unifont"/>
               </a:rPr>
               <a:t> given sufficient data and complexity.</a:t>
             </a:r>
@@ -4974,17 +4978,17 @@
                 <a:effectLst/>
                 <a:uFillTx/>
                 <a:latin typeface="Calibri"/>
+                <a:ea typeface="Unifont"/>
               </a:rPr>
               <a:t> </a:t>
             </a:r>
-            <a:endParaRPr b="0" lang="en-US" sz="2400" strike="noStrike" u="none">
-              <a:solidFill>
-                <a:srgbClr val="000000"/>
-              </a:solidFill>
-              <a:effectLst/>
-              <a:uFillTx/>
-              <a:latin typeface="Arial"/>
-              <a:ea typeface="Unifont"/>
+            <a:endParaRPr b="0" lang="fr-FR" sz="2400" strike="noStrike" u="none">
+              <a:solidFill>
+                <a:srgbClr val="000000"/>
+              </a:solidFill>
+              <a:effectLst/>
+              <a:uFillTx/>
+              <a:latin typeface="Arial"/>
             </a:endParaRPr>
           </a:p>
           <a:p>
@@ -5009,21 +5013,21 @@
                 <a:effectLst/>
                 <a:uFillTx/>
                 <a:latin typeface="Calibri"/>
+                <a:ea typeface="Unifont"/>
               </a:rPr>
               <a:t>General Behavior:</a:t>
             </a:r>
-            <a:endParaRPr b="0" lang="en-US" sz="2400" strike="noStrike" u="none">
-              <a:solidFill>
-                <a:srgbClr val="000000"/>
-              </a:solidFill>
-              <a:effectLst/>
-              <a:uFillTx/>
-              <a:latin typeface="Arial"/>
-              <a:ea typeface="Unifont"/>
-            </a:endParaRPr>
-          </a:p>
-          <a:p>
-            <a:pPr marL="360000" defTabSz="343080">
+            <a:endParaRPr b="0" lang="fr-FR" sz="2400" strike="noStrike" u="none">
+              <a:solidFill>
+                <a:srgbClr val="000000"/>
+              </a:solidFill>
+              <a:effectLst/>
+              <a:uFillTx/>
+              <a:latin typeface="Arial"/>
+            </a:endParaRPr>
+          </a:p>
+          <a:p>
+            <a:pPr marL="360000" indent="-343080" defTabSz="343080">
               <a:lnSpc>
                 <a:spcPct val="100000"/>
               </a:lnSpc>
@@ -5044,21 +5048,21 @@
                 <a:effectLst/>
                 <a:uFillTx/>
                 <a:latin typeface="Calibri"/>
+                <a:ea typeface="Unifont"/>
               </a:rPr>
               <a:t>All AI methods (CNNs, RNNs, SVMs) follow the same principle: map inputs to outputs via learned weights.</a:t>
             </a:r>
-            <a:endParaRPr b="0" lang="en-US" sz="2400" strike="noStrike" u="none">
-              <a:solidFill>
-                <a:srgbClr val="000000"/>
-              </a:solidFill>
-              <a:effectLst/>
-              <a:uFillTx/>
-              <a:latin typeface="Arial"/>
-              <a:ea typeface="Unifont"/>
-            </a:endParaRPr>
-          </a:p>
-          <a:p>
-            <a:pPr marL="360000" defTabSz="343080">
+            <a:endParaRPr b="0" lang="fr-FR" sz="2400" strike="noStrike" u="none">
+              <a:solidFill>
+                <a:srgbClr val="000000"/>
+              </a:solidFill>
+              <a:effectLst/>
+              <a:uFillTx/>
+              <a:latin typeface="Arial"/>
+            </a:endParaRPr>
+          </a:p>
+          <a:p>
+            <a:pPr marL="360000" indent="-343080" defTabSz="343080">
               <a:lnSpc>
                 <a:spcPct val="100000"/>
               </a:lnSpc>
@@ -5079,17 +5083,17 @@
                 <a:effectLst/>
                 <a:uFillTx/>
                 <a:latin typeface="Calibri"/>
+                <a:ea typeface="Unifont"/>
               </a:rPr>
               <a:t>Differences lie in architecture, training efficiency, and interpretability.</a:t>
             </a:r>
-            <a:endParaRPr b="0" lang="en-US" sz="2400" strike="noStrike" u="none">
-              <a:solidFill>
-                <a:srgbClr val="000000"/>
-              </a:solidFill>
-              <a:effectLst/>
-              <a:uFillTx/>
-              <a:latin typeface="Arial"/>
-              <a:ea typeface="Unifont"/>
+            <a:endParaRPr b="0" lang="fr-FR" sz="2400" strike="noStrike" u="none">
+              <a:solidFill>
+                <a:srgbClr val="000000"/>
+              </a:solidFill>
+              <a:effectLst/>
+              <a:uFillTx/>
+              <a:latin typeface="Arial"/>
             </a:endParaRPr>
           </a:p>
         </p:txBody>
@@ -5133,7 +5137,7 @@
         <p:spPr>
           <a:xfrm>
             <a:off x="548640" y="384120"/>
-            <a:ext cx="9142560" cy="291240"/>
+            <a:ext cx="9142200" cy="290880"/>
           </a:xfrm>
           <a:prstGeom prst="rect">
             <a:avLst/>
@@ -5179,7 +5183,7 @@
               </a:rPr>
               <a:t>General AI Methodology</a:t>
             </a:r>
-            <a:endParaRPr b="0" lang="en-US" sz="1200" strike="noStrike" u="none">
+            <a:endParaRPr b="0" lang="fr-FR" sz="1200" strike="noStrike" u="none">
               <a:solidFill>
                 <a:srgbClr val="000000"/>
               </a:solidFill>
@@ -5199,7 +5203,7 @@
         <p:spPr>
           <a:xfrm>
             <a:off x="548640" y="658440"/>
-            <a:ext cx="11062800" cy="821520"/>
+            <a:ext cx="11062440" cy="821160"/>
           </a:xfrm>
           <a:prstGeom prst="rect">
             <a:avLst/>
@@ -5245,7 +5249,7 @@
               </a:rPr>
               <a:t>General AI Methodology</a:t>
             </a:r>
-            <a:endParaRPr b="0" lang="en-US" sz="3000" strike="noStrike" u="none">
+            <a:endParaRPr b="0" lang="fr-FR" sz="3000" strike="noStrike" u="none">
               <a:solidFill>
                 <a:srgbClr val="000000"/>
               </a:solidFill>
@@ -5265,7 +5269,7 @@
         <p:spPr>
           <a:xfrm>
             <a:off x="11185920" y="6446520"/>
-            <a:ext cx="455760" cy="272880"/>
+            <a:ext cx="455400" cy="272520"/>
           </a:xfrm>
           <a:prstGeom prst="rect">
             <a:avLst/>
@@ -5306,7 +5310,7 @@
               </a:rPr>
               <a:t>2</a:t>
             </a:r>
-            <a:endParaRPr b="0" lang="en-US" sz="900" strike="noStrike" u="none">
+            <a:endParaRPr b="0" lang="fr-FR" sz="900" strike="noStrike" u="none">
               <a:solidFill>
                 <a:srgbClr val="000000"/>
               </a:solidFill>
@@ -5326,7 +5330,7 @@
         <p:spPr>
           <a:xfrm>
             <a:off x="540000" y="1800000"/>
-            <a:ext cx="10979280" cy="4604760"/>
+            <a:ext cx="10978920" cy="4604760"/>
           </a:xfrm>
           <a:prstGeom prst="rect">
             <a:avLst/>
@@ -5380,7 +5384,18 @@
             <a:br>
               <a:rPr sz="2400"/>
             </a:br>
-            <a:endParaRPr b="0" lang="en-US" sz="2400" strike="noStrike" u="none">
+            <a:r>
+              <a:rPr b="0" lang="en-US" sz="2400" strike="noStrike" u="none">
+                <a:solidFill>
+                  <a:srgbClr val="000000"/>
+                </a:solidFill>
+                <a:effectLst/>
+                <a:uFillTx/>
+                <a:latin typeface="Arial"/>
+              </a:rPr>
+              <a:t> </a:t>
+            </a:r>
+            <a:endParaRPr b="0" lang="fr-FR" sz="2400" strike="noStrike" u="none">
               <a:solidFill>
                 <a:srgbClr val="000000"/>
               </a:solidFill>
@@ -5427,18 +5442,17 @@
               </a:rPr>
               <a:t>: Minimize the loss function (e.g., Mean Squared Error, Cross-Entropy).</a:t>
             </a:r>
-            <a:endParaRPr b="0" lang="en-US" sz="2400" strike="noStrike" u="none">
-              <a:solidFill>
-                <a:srgbClr val="000000"/>
-              </a:solidFill>
-              <a:effectLst/>
-              <a:uFillTx/>
-              <a:latin typeface="Arial"/>
-              <a:ea typeface="Unifont"/>
-            </a:endParaRPr>
-          </a:p>
-          <a:p>
-            <a:pPr marL="360000" defTabSz="343080">
+            <a:endParaRPr b="0" lang="fr-FR" sz="2400" strike="noStrike" u="none">
+              <a:solidFill>
+                <a:srgbClr val="000000"/>
+              </a:solidFill>
+              <a:effectLst/>
+              <a:uFillTx/>
+              <a:latin typeface="Arial"/>
+            </a:endParaRPr>
+          </a:p>
+          <a:p>
+            <a:pPr marL="360000" indent="-343080" defTabSz="343080">
               <a:lnSpc>
                 <a:spcPct val="100000"/>
               </a:lnSpc>
@@ -5463,14 +5477,13 @@
               </a:rPr>
               <a:t>Loss Function: Measures the difference between predicted and actual outputs.</a:t>
             </a:r>
-            <a:endParaRPr b="0" lang="en-US" sz="2400" strike="noStrike" u="none">
-              <a:solidFill>
-                <a:srgbClr val="000000"/>
-              </a:solidFill>
-              <a:effectLst/>
-              <a:uFillTx/>
-              <a:latin typeface="Arial"/>
-              <a:ea typeface="Unifont"/>
+            <a:endParaRPr b="0" lang="fr-FR" sz="2400" strike="noStrike" u="none">
+              <a:solidFill>
+                <a:srgbClr val="000000"/>
+              </a:solidFill>
+              <a:effectLst/>
+              <a:uFillTx/>
+              <a:latin typeface="Arial"/>
             </a:endParaRPr>
           </a:p>
           <a:p>
@@ -5511,18 +5524,17 @@
               </a:rPr>
               <a:t>:</a:t>
             </a:r>
-            <a:endParaRPr b="0" lang="en-US" sz="2400" strike="noStrike" u="none">
-              <a:solidFill>
-                <a:srgbClr val="000000"/>
-              </a:solidFill>
-              <a:effectLst/>
-              <a:uFillTx/>
-              <a:latin typeface="Arial"/>
-              <a:ea typeface="Unifont"/>
-            </a:endParaRPr>
-          </a:p>
-          <a:p>
-            <a:pPr marL="360000" defTabSz="343080">
+            <a:endParaRPr b="0" lang="fr-FR" sz="2400" strike="noStrike" u="none">
+              <a:solidFill>
+                <a:srgbClr val="000000"/>
+              </a:solidFill>
+              <a:effectLst/>
+              <a:uFillTx/>
+              <a:latin typeface="Arial"/>
+            </a:endParaRPr>
+          </a:p>
+          <a:p>
+            <a:pPr marL="360000" indent="-343080" defTabSz="343080">
               <a:lnSpc>
                 <a:spcPct val="100000"/>
               </a:lnSpc>
@@ -5547,18 +5559,17 @@
               </a:rPr>
               <a:t>Forward Pass: Compute predictions for a batch of training data.</a:t>
             </a:r>
-            <a:endParaRPr b="0" lang="en-US" sz="2400" strike="noStrike" u="none">
-              <a:solidFill>
-                <a:srgbClr val="000000"/>
-              </a:solidFill>
-              <a:effectLst/>
-              <a:uFillTx/>
-              <a:latin typeface="Arial"/>
-              <a:ea typeface="Unifont"/>
-            </a:endParaRPr>
-          </a:p>
-          <a:p>
-            <a:pPr marL="360000" defTabSz="343080">
+            <a:endParaRPr b="0" lang="fr-FR" sz="2400" strike="noStrike" u="none">
+              <a:solidFill>
+                <a:srgbClr val="000000"/>
+              </a:solidFill>
+              <a:effectLst/>
+              <a:uFillTx/>
+              <a:latin typeface="Arial"/>
+            </a:endParaRPr>
+          </a:p>
+          <a:p>
+            <a:pPr marL="360000" indent="-343080" defTabSz="343080">
               <a:lnSpc>
                 <a:spcPct val="100000"/>
               </a:lnSpc>
@@ -5583,18 +5594,17 @@
               </a:rPr>
               <a:t>Loss Calculation: Evaluate how far predictions are from true values.</a:t>
             </a:r>
-            <a:endParaRPr b="0" lang="en-US" sz="2400" strike="noStrike" u="none">
-              <a:solidFill>
-                <a:srgbClr val="000000"/>
-              </a:solidFill>
-              <a:effectLst/>
-              <a:uFillTx/>
-              <a:latin typeface="Arial"/>
-              <a:ea typeface="Unifont"/>
-            </a:endParaRPr>
-          </a:p>
-          <a:p>
-            <a:pPr marL="360000" defTabSz="343080">
+            <a:endParaRPr b="0" lang="fr-FR" sz="2400" strike="noStrike" u="none">
+              <a:solidFill>
+                <a:srgbClr val="000000"/>
+              </a:solidFill>
+              <a:effectLst/>
+              <a:uFillTx/>
+              <a:latin typeface="Arial"/>
+            </a:endParaRPr>
+          </a:p>
+          <a:p>
+            <a:pPr marL="360000" indent="-343080" defTabSz="343080">
               <a:lnSpc>
                 <a:spcPct val="100000"/>
               </a:lnSpc>
@@ -5619,18 +5629,17 @@
               </a:rPr>
               <a:t>Backpropagation: Compute gradients of the loss with respect to weights.</a:t>
             </a:r>
-            <a:endParaRPr b="0" lang="en-US" sz="2400" strike="noStrike" u="none">
-              <a:solidFill>
-                <a:srgbClr val="000000"/>
-              </a:solidFill>
-              <a:effectLst/>
-              <a:uFillTx/>
-              <a:latin typeface="Arial"/>
-              <a:ea typeface="Unifont"/>
-            </a:endParaRPr>
-          </a:p>
-          <a:p>
-            <a:pPr marL="360000" defTabSz="343080">
+            <a:endParaRPr b="0" lang="fr-FR" sz="2400" strike="noStrike" u="none">
+              <a:solidFill>
+                <a:srgbClr val="000000"/>
+              </a:solidFill>
+              <a:effectLst/>
+              <a:uFillTx/>
+              <a:latin typeface="Arial"/>
+            </a:endParaRPr>
+          </a:p>
+          <a:p>
+            <a:pPr marL="360000" indent="-343080" defTabSz="343080">
               <a:lnSpc>
                 <a:spcPct val="100000"/>
               </a:lnSpc>
@@ -5655,38 +5664,31 @@
               </a:rPr>
               <a:t>Optimization: Update weights using an optimizer (e.g., Adam, SGD).</a:t>
             </a:r>
-            <a:endParaRPr b="0" lang="en-US" sz="2400" strike="noStrike" u="none">
-              <a:solidFill>
-                <a:srgbClr val="000000"/>
-              </a:solidFill>
-              <a:effectLst/>
-              <a:uFillTx/>
-              <a:latin typeface="Arial"/>
-              <a:ea typeface="Unifont"/>
-            </a:endParaRPr>
-          </a:p>
-          <a:p>
-            <a:pPr marL="343080" indent="-343080" defTabSz="343080">
-              <a:lnSpc>
-                <a:spcPct val="100000"/>
-              </a:lnSpc>
-              <a:buClr>
-                <a:srgbClr val="000000"/>
-              </a:buClr>
-              <a:buFont typeface="Arial"/>
-              <a:buChar char="•"/>
-              <a:tabLst>
-                <a:tab algn="l" pos="0"/>
-              </a:tabLst>
-            </a:pPr>
-            <a:endParaRPr b="0" lang="en-US" sz="2400" strike="noStrike" u="none">
-              <a:solidFill>
-                <a:srgbClr val="000000"/>
-              </a:solidFill>
-              <a:effectLst/>
-              <a:uFillTx/>
-              <a:latin typeface="Arial"/>
-              <a:ea typeface="Unifont"/>
+            <a:endParaRPr b="0" lang="fr-FR" sz="2400" strike="noStrike" u="none">
+              <a:solidFill>
+                <a:srgbClr val="000000"/>
+              </a:solidFill>
+              <a:effectLst/>
+              <a:uFillTx/>
+              <a:latin typeface="Arial"/>
+            </a:endParaRPr>
+          </a:p>
+          <a:p>
+            <a:pPr defTabSz="343080">
+              <a:lnSpc>
+                <a:spcPct val="100000"/>
+              </a:lnSpc>
+              <a:tabLst>
+                <a:tab algn="l" pos="0"/>
+              </a:tabLst>
+            </a:pPr>
+            <a:endParaRPr b="0" lang="fr-FR" sz="2400" strike="noStrike" u="none">
+              <a:solidFill>
+                <a:srgbClr val="000000"/>
+              </a:solidFill>
+              <a:effectLst/>
+              <a:uFillTx/>
+              <a:latin typeface="Arial"/>
             </a:endParaRPr>
           </a:p>
         </p:txBody>
@@ -5730,7 +5732,7 @@
         <p:spPr>
           <a:xfrm>
             <a:off x="548640" y="383760"/>
-            <a:ext cx="9142560" cy="291240"/>
+            <a:ext cx="9142200" cy="290880"/>
           </a:xfrm>
           <a:prstGeom prst="rect">
             <a:avLst/>
@@ -5776,7 +5778,7 @@
               </a:rPr>
               <a:t>General AI Methodology</a:t>
             </a:r>
-            <a:endParaRPr b="0" lang="en-US" sz="1200" strike="noStrike" u="none">
+            <a:endParaRPr b="0" lang="fr-FR" sz="1200" strike="noStrike" u="none">
               <a:solidFill>
                 <a:srgbClr val="000000"/>
               </a:solidFill>
@@ -5796,7 +5798,7 @@
         <p:spPr>
           <a:xfrm>
             <a:off x="548640" y="658080"/>
-            <a:ext cx="11062800" cy="821520"/>
+            <a:ext cx="11062440" cy="821160"/>
           </a:xfrm>
           <a:prstGeom prst="rect">
             <a:avLst/>
@@ -5842,7 +5844,7 @@
               </a:rPr>
               <a:t>General AI Methodology</a:t>
             </a:r>
-            <a:endParaRPr b="0" lang="en-US" sz="3000" strike="noStrike" u="none">
+            <a:endParaRPr b="0" lang="fr-FR" sz="3000" strike="noStrike" u="none">
               <a:solidFill>
                 <a:srgbClr val="000000"/>
               </a:solidFill>
@@ -5862,7 +5864,7 @@
         <p:spPr>
           <a:xfrm>
             <a:off x="11185920" y="6446160"/>
-            <a:ext cx="455760" cy="272880"/>
+            <a:ext cx="455400" cy="272520"/>
           </a:xfrm>
           <a:prstGeom prst="rect">
             <a:avLst/>
@@ -5903,7 +5905,7 @@
               </a:rPr>
               <a:t>2</a:t>
             </a:r>
-            <a:endParaRPr b="0" lang="en-US" sz="900" strike="noStrike" u="none">
+            <a:endParaRPr b="0" lang="fr-FR" sz="900" strike="noStrike" u="none">
               <a:solidFill>
                 <a:srgbClr val="000000"/>
               </a:solidFill>
@@ -5923,7 +5925,7 @@
         <p:spPr>
           <a:xfrm>
             <a:off x="540000" y="1799640"/>
-            <a:ext cx="10979280" cy="2776680"/>
+            <a:ext cx="10978920" cy="2775960"/>
           </a:xfrm>
           <a:prstGeom prst="rect">
             <a:avLst/>
@@ -5974,7 +5976,25 @@
               </a:rPr>
               <a:t>Training: The Core Process</a:t>
             </a:r>
-            <a:endParaRPr b="0" lang="en-US" sz="2400" strike="noStrike" u="none">
+            <a:endParaRPr b="0" lang="fr-FR" sz="2400" strike="noStrike" u="none">
+              <a:solidFill>
+                <a:srgbClr val="000000"/>
+              </a:solidFill>
+              <a:effectLst/>
+              <a:uFillTx/>
+              <a:latin typeface="Arial"/>
+            </a:endParaRPr>
+          </a:p>
+          <a:p>
+            <a:pPr defTabSz="343080">
+              <a:lnSpc>
+                <a:spcPct val="100000"/>
+              </a:lnSpc>
+              <a:tabLst>
+                <a:tab algn="l" pos="0"/>
+              </a:tabLst>
+            </a:pPr>
+            <a:endParaRPr b="0" lang="fr-FR" sz="2400" strike="noStrike" u="none">
               <a:solidFill>
                 <a:srgbClr val="000000"/>
               </a:solidFill>
@@ -5997,18 +6017,29 @@
                 <a:tab algn="l" pos="0"/>
               </a:tabLst>
             </a:pPr>
-            <a:endParaRPr b="0" lang="en-US" sz="2400" strike="noStrike" u="none">
-              <a:solidFill>
-                <a:srgbClr val="000000"/>
-              </a:solidFill>
-              <a:effectLst/>
-              <a:uFillTx/>
-              <a:latin typeface="Arial"/>
-              <a:ea typeface="Unifont"/>
-            </a:endParaRPr>
-          </a:p>
-          <a:p>
-            <a:pPr marL="343080" indent="-343080" defTabSz="343080">
+            <a:r>
+              <a:rPr b="1" lang="fr-FR" sz="2400" strike="noStrike" u="none">
+                <a:solidFill>
+                  <a:srgbClr val="000000"/>
+                </a:solidFill>
+                <a:effectLst/>
+                <a:uFillTx/>
+                <a:latin typeface="Arial"/>
+                <a:ea typeface="Unifont"/>
+              </a:rPr>
+              <a:t>Key Factors for Success:</a:t>
+            </a:r>
+            <a:endParaRPr b="0" lang="fr-FR" sz="2400" strike="noStrike" u="none">
+              <a:solidFill>
+                <a:srgbClr val="000000"/>
+              </a:solidFill>
+              <a:effectLst/>
+              <a:uFillTx/>
+              <a:latin typeface="Arial"/>
+            </a:endParaRPr>
+          </a:p>
+          <a:p>
+            <a:pPr marL="360000" indent="-343080" defTabSz="343080">
               <a:lnSpc>
                 <a:spcPct val="100000"/>
               </a:lnSpc>
@@ -6022,7 +6053,7 @@
               </a:tabLst>
             </a:pPr>
             <a:r>
-              <a:rPr b="1" lang="fr-FR" sz="2400" strike="noStrike" u="none">
+              <a:rPr b="0" lang="fr-FR" sz="2400" strike="noStrike" u="none">
                 <a:solidFill>
                   <a:srgbClr val="000000"/>
                 </a:solidFill>
@@ -6031,20 +6062,19 @@
                 <a:latin typeface="Arial"/>
                 <a:ea typeface="Unifont"/>
               </a:rPr>
-              <a:t>Key Factors for Success:</a:t>
-            </a:r>
-            <a:endParaRPr b="0" lang="en-US" sz="2400" strike="noStrike" u="none">
-              <a:solidFill>
-                <a:srgbClr val="000000"/>
-              </a:solidFill>
-              <a:effectLst/>
-              <a:uFillTx/>
-              <a:latin typeface="Arial"/>
-              <a:ea typeface="Unifont"/>
-            </a:endParaRPr>
-          </a:p>
-          <a:p>
-            <a:pPr marL="360000" defTabSz="343080">
+              <a:t>Data Quality: High-fidelity simulations with diverse parameters.</a:t>
+            </a:r>
+            <a:endParaRPr b="0" lang="fr-FR" sz="2400" strike="noStrike" u="none">
+              <a:solidFill>
+                <a:srgbClr val="000000"/>
+              </a:solidFill>
+              <a:effectLst/>
+              <a:uFillTx/>
+              <a:latin typeface="Arial"/>
+            </a:endParaRPr>
+          </a:p>
+          <a:p>
+            <a:pPr marL="360000" indent="-343080" defTabSz="343080">
               <a:lnSpc>
                 <a:spcPct val="100000"/>
               </a:lnSpc>
@@ -6067,20 +6097,19 @@
                 <a:latin typeface="Arial"/>
                 <a:ea typeface="Unifont"/>
               </a:rPr>
-              <a:t>Data Quality: High-fidelity simulations with diverse parameters.</a:t>
-            </a:r>
-            <a:endParaRPr b="0" lang="en-US" sz="2400" strike="noStrike" u="none">
-              <a:solidFill>
-                <a:srgbClr val="000000"/>
-              </a:solidFill>
-              <a:effectLst/>
-              <a:uFillTx/>
-              <a:latin typeface="Arial"/>
-              <a:ea typeface="Unifont"/>
-            </a:endParaRPr>
-          </a:p>
-          <a:p>
-            <a:pPr marL="360000" defTabSz="343080">
+              <a:t>Model Architecture: Match complexity to the problem (e.g., CNNs for images, Transformers for sequences).</a:t>
+            </a:r>
+            <a:endParaRPr b="0" lang="fr-FR" sz="2400" strike="noStrike" u="none">
+              <a:solidFill>
+                <a:srgbClr val="000000"/>
+              </a:solidFill>
+              <a:effectLst/>
+              <a:uFillTx/>
+              <a:latin typeface="Arial"/>
+            </a:endParaRPr>
+          </a:p>
+          <a:p>
+            <a:pPr marL="360000" indent="-343080" defTabSz="343080">
               <a:lnSpc>
                 <a:spcPct val="100000"/>
               </a:lnSpc>
@@ -6103,52 +6132,15 @@
                 <a:latin typeface="Arial"/>
                 <a:ea typeface="Unifont"/>
               </a:rPr>
-              <a:t>Model Architecture: Match complexity to the problem (e.g., CNNs for images, Transformers for sequences).</a:t>
-            </a:r>
-            <a:endParaRPr b="0" lang="en-US" sz="2400" strike="noStrike" u="none">
-              <a:solidFill>
-                <a:srgbClr val="000000"/>
-              </a:solidFill>
-              <a:effectLst/>
-              <a:uFillTx/>
-              <a:latin typeface="Arial"/>
-              <a:ea typeface="Unifont"/>
-            </a:endParaRPr>
-          </a:p>
-          <a:p>
-            <a:pPr marL="360000" defTabSz="343080">
-              <a:lnSpc>
-                <a:spcPct val="100000"/>
-              </a:lnSpc>
-              <a:buClr>
-                <a:srgbClr val="000000"/>
-              </a:buClr>
-              <a:buFont typeface="Arial"/>
-              <a:buChar char="•"/>
-              <a:tabLst>
-                <a:tab algn="l" pos="0"/>
-              </a:tabLst>
-            </a:pPr>
-            <a:r>
-              <a:rPr b="0" lang="fr-FR" sz="2400" strike="noStrike" u="none">
-                <a:solidFill>
-                  <a:srgbClr val="000000"/>
-                </a:solidFill>
-                <a:effectLst/>
-                <a:uFillTx/>
-                <a:latin typeface="Arial"/>
-                <a:ea typeface="Unifont"/>
-              </a:rPr>
               <a:t>Hyperparameters: Learning rate, batch size, number of epochs.</a:t>
             </a:r>
-            <a:endParaRPr b="0" lang="en-US" sz="2400" strike="noStrike" u="none">
-              <a:solidFill>
-                <a:srgbClr val="000000"/>
-              </a:solidFill>
-              <a:effectLst/>
-              <a:uFillTx/>
-              <a:latin typeface="Arial"/>
-              <a:ea typeface="Unifont"/>
+            <a:endParaRPr b="0" lang="fr-FR" sz="2400" strike="noStrike" u="none">
+              <a:solidFill>
+                <a:srgbClr val="000000"/>
+              </a:solidFill>
+              <a:effectLst/>
+              <a:uFillTx/>
+              <a:latin typeface="Arial"/>
             </a:endParaRPr>
           </a:p>
         </p:txBody>
@@ -6192,7 +6184,7 @@
         <p:spPr>
           <a:xfrm>
             <a:off x="548640" y="383760"/>
-            <a:ext cx="9142560" cy="291240"/>
+            <a:ext cx="9142200" cy="290880"/>
           </a:xfrm>
           <a:prstGeom prst="rect">
             <a:avLst/>
@@ -6238,7 +6230,7 @@
               </a:rPr>
               <a:t>Lessons and praticals</a:t>
             </a:r>
-            <a:endParaRPr b="0" lang="en-US" sz="1200" strike="noStrike" u="none">
+            <a:endParaRPr b="0" lang="fr-FR" sz="1200" strike="noStrike" u="none">
               <a:solidFill>
                 <a:srgbClr val="000000"/>
               </a:solidFill>
@@ -6258,7 +6250,7 @@
         <p:spPr>
           <a:xfrm>
             <a:off x="548640" y="658080"/>
-            <a:ext cx="11062800" cy="821520"/>
+            <a:ext cx="11062440" cy="821160"/>
           </a:xfrm>
           <a:prstGeom prst="rect">
             <a:avLst/>
@@ -6304,7 +6296,7 @@
               </a:rPr>
               <a:t>What You Will Learn and Practice</a:t>
             </a:r>
-            <a:endParaRPr b="0" lang="en-US" sz="3000" strike="noStrike" u="none">
+            <a:endParaRPr b="0" lang="fr-FR" sz="3000" strike="noStrike" u="none">
               <a:solidFill>
                 <a:srgbClr val="000000"/>
               </a:solidFill>
@@ -6324,7 +6316,7 @@
         <p:spPr>
           <a:xfrm>
             <a:off x="11185920" y="6446160"/>
-            <a:ext cx="455760" cy="272880"/>
+            <a:ext cx="455400" cy="272520"/>
           </a:xfrm>
           <a:prstGeom prst="rect">
             <a:avLst/>
@@ -6365,7 +6357,7 @@
               </a:rPr>
               <a:t>2</a:t>
             </a:r>
-            <a:endParaRPr b="0" lang="en-US" sz="900" strike="noStrike" u="none">
+            <a:endParaRPr b="0" lang="fr-FR" sz="900" strike="noStrike" u="none">
               <a:solidFill>
                 <a:srgbClr val="000000"/>
               </a:solidFill>
@@ -6385,7 +6377,7 @@
         <p:spPr>
           <a:xfrm>
             <a:off x="540000" y="1799640"/>
-            <a:ext cx="10979280" cy="4303800"/>
+            <a:ext cx="10978920" cy="4303080"/>
           </a:xfrm>
           <a:prstGeom prst="rect">
             <a:avLst/>
@@ -6436,37 +6428,31 @@
               </a:rPr>
               <a:t>Hands-on skills</a:t>
             </a:r>
-            <a:endParaRPr b="0" lang="en-US" sz="2400" strike="noStrike" u="none">
-              <a:solidFill>
-                <a:srgbClr val="000000"/>
-              </a:solidFill>
-              <a:effectLst/>
-              <a:uFillTx/>
-              <a:latin typeface="Arial"/>
-            </a:endParaRPr>
-          </a:p>
-          <a:p>
-            <a:pPr marL="343080" indent="-343080" defTabSz="343080">
-              <a:lnSpc>
-                <a:spcPct val="100000"/>
-              </a:lnSpc>
-              <a:buClr>
-                <a:srgbClr val="000000"/>
-              </a:buClr>
-              <a:buFont typeface="Arial"/>
-              <a:buChar char="•"/>
-              <a:tabLst>
-                <a:tab algn="l" pos="0"/>
-              </a:tabLst>
-            </a:pPr>
-            <a:endParaRPr b="0" lang="en-US" sz="1000" strike="noStrike" u="none">
-              <a:solidFill>
-                <a:srgbClr val="000000"/>
-              </a:solidFill>
-              <a:effectLst/>
-              <a:uFillTx/>
-              <a:latin typeface="Arial"/>
-              <a:ea typeface="Unifont"/>
+            <a:endParaRPr b="0" lang="fr-FR" sz="2400" strike="noStrike" u="none">
+              <a:solidFill>
+                <a:srgbClr val="000000"/>
+              </a:solidFill>
+              <a:effectLst/>
+              <a:uFillTx/>
+              <a:latin typeface="Arial"/>
+            </a:endParaRPr>
+          </a:p>
+          <a:p>
+            <a:pPr defTabSz="343080">
+              <a:lnSpc>
+                <a:spcPct val="100000"/>
+              </a:lnSpc>
+              <a:tabLst>
+                <a:tab algn="l" pos="0"/>
+              </a:tabLst>
+            </a:pPr>
+            <a:endParaRPr b="0" lang="fr-FR" sz="1000" strike="noStrike" u="none">
+              <a:solidFill>
+                <a:srgbClr val="000000"/>
+              </a:solidFill>
+              <a:effectLst/>
+              <a:uFillTx/>
+              <a:latin typeface="Arial"/>
             </a:endParaRPr>
           </a:p>
           <a:p>
@@ -6501,17 +6487,17 @@
               </a:rPr>
               <a:t>Setting Up Simulations:</a:t>
             </a:r>
-            <a:endParaRPr b="0" lang="en-US" sz="2400" strike="noStrike" u="none">
-              <a:solidFill>
-                <a:srgbClr val="000000"/>
-              </a:solidFill>
-              <a:effectLst/>
-              <a:uFillTx/>
-              <a:latin typeface="Arial"/>
-            </a:endParaRPr>
-          </a:p>
-          <a:p>
-            <a:pPr marL="360000" defTabSz="343080">
+            <a:endParaRPr b="0" lang="fr-FR" sz="2400" strike="noStrike" u="none">
+              <a:solidFill>
+                <a:srgbClr val="000000"/>
+              </a:solidFill>
+              <a:effectLst/>
+              <a:uFillTx/>
+              <a:latin typeface="Arial"/>
+            </a:endParaRPr>
+          </a:p>
+          <a:p>
+            <a:pPr marL="360000" indent="-343080" defTabSz="343080">
               <a:lnSpc>
                 <a:spcPct val="100000"/>
               </a:lnSpc>
@@ -6536,18 +6522,17 @@
               </a:rPr>
               <a:t>Configure beamlines/instruments in McStas (neutrons) and McXtrace (X-rays).</a:t>
             </a:r>
-            <a:endParaRPr b="0" lang="en-US" sz="2400" strike="noStrike" u="none">
-              <a:solidFill>
-                <a:srgbClr val="000000"/>
-              </a:solidFill>
-              <a:effectLst/>
-              <a:uFillTx/>
-              <a:latin typeface="Arial"/>
-              <a:ea typeface="Unifont"/>
-            </a:endParaRPr>
-          </a:p>
-          <a:p>
-            <a:pPr marL="360000" defTabSz="343080">
+            <a:endParaRPr b="0" lang="fr-FR" sz="2400" strike="noStrike" u="none">
+              <a:solidFill>
+                <a:srgbClr val="000000"/>
+              </a:solidFill>
+              <a:effectLst/>
+              <a:uFillTx/>
+              <a:latin typeface="Arial"/>
+            </a:endParaRPr>
+          </a:p>
+          <a:p>
+            <a:pPr marL="360000" indent="-343080" defTabSz="343080">
               <a:lnSpc>
                 <a:spcPct val="100000"/>
               </a:lnSpc>
@@ -6583,17 +6568,17 @@
                 <a:effectLst/>
                 <a:uFillTx/>
                 <a:latin typeface="Arial"/>
+                <a:ea typeface="Unifont"/>
               </a:rPr>
               <a:t> </a:t>
             </a:r>
-            <a:endParaRPr b="0" lang="en-US" sz="2400" strike="noStrike" u="none">
-              <a:solidFill>
-                <a:srgbClr val="000000"/>
-              </a:solidFill>
-              <a:effectLst/>
-              <a:uFillTx/>
-              <a:latin typeface="Arial"/>
-              <a:ea typeface="Unifont"/>
+            <a:endParaRPr b="0" lang="fr-FR" sz="2400" strike="noStrike" u="none">
+              <a:solidFill>
+                <a:srgbClr val="000000"/>
+              </a:solidFill>
+              <a:effectLst/>
+              <a:uFillTx/>
+              <a:latin typeface="Arial"/>
             </a:endParaRPr>
           </a:p>
           <a:p>
@@ -6622,18 +6607,17 @@
               </a:rPr>
               <a:t>Characterizing Models:</a:t>
             </a:r>
-            <a:endParaRPr b="0" lang="en-US" sz="2400" strike="noStrike" u="none">
-              <a:solidFill>
-                <a:srgbClr val="000000"/>
-              </a:solidFill>
-              <a:effectLst/>
-              <a:uFillTx/>
-              <a:latin typeface="Arial"/>
-              <a:ea typeface="Unifont"/>
-            </a:endParaRPr>
-          </a:p>
-          <a:p>
-            <a:pPr marL="360000" defTabSz="343080">
+            <a:endParaRPr b="0" lang="fr-FR" sz="2400" strike="noStrike" u="none">
+              <a:solidFill>
+                <a:srgbClr val="000000"/>
+              </a:solidFill>
+              <a:effectLst/>
+              <a:uFillTx/>
+              <a:latin typeface="Arial"/>
+            </a:endParaRPr>
+          </a:p>
+          <a:p>
+            <a:pPr marL="360000" indent="-343080" defTabSz="343080">
               <a:lnSpc>
                 <a:spcPct val="100000"/>
               </a:lnSpc>
@@ -6658,18 +6642,17 @@
               </a:rPr>
               <a:t>Check geometry (e.g., detector positions, slit sizes).</a:t>
             </a:r>
-            <a:endParaRPr b="0" lang="en-US" sz="2400" strike="noStrike" u="none">
-              <a:solidFill>
-                <a:srgbClr val="000000"/>
-              </a:solidFill>
-              <a:effectLst/>
-              <a:uFillTx/>
-              <a:latin typeface="Arial"/>
-              <a:ea typeface="Unifont"/>
-            </a:endParaRPr>
-          </a:p>
-          <a:p>
-            <a:pPr marL="360000" defTabSz="343080">
+            <a:endParaRPr b="0" lang="fr-FR" sz="2400" strike="noStrike" u="none">
+              <a:solidFill>
+                <a:srgbClr val="000000"/>
+              </a:solidFill>
+              <a:effectLst/>
+              <a:uFillTx/>
+              <a:latin typeface="Arial"/>
+            </a:endParaRPr>
+          </a:p>
+          <a:p>
+            <a:pPr marL="360000" indent="-343080" defTabSz="343080">
               <a:lnSpc>
                 <a:spcPct val="100000"/>
               </a:lnSpc>
@@ -6694,14 +6677,13 @@
               </a:rPr>
               <a:t>Extract parameters (e.g., resolution, flux) and results (e.g., spectra, diffraction patterns).</a:t>
             </a:r>
-            <a:endParaRPr b="0" lang="en-US" sz="2400" strike="noStrike" u="none">
-              <a:solidFill>
-                <a:srgbClr val="000000"/>
-              </a:solidFill>
-              <a:effectLst/>
-              <a:uFillTx/>
-              <a:latin typeface="Arial"/>
-              <a:ea typeface="Unifont"/>
+            <a:endParaRPr b="0" lang="fr-FR" sz="2400" strike="noStrike" u="none">
+              <a:solidFill>
+                <a:srgbClr val="000000"/>
+              </a:solidFill>
+              <a:effectLst/>
+              <a:uFillTx/>
+              <a:latin typeface="Arial"/>
             </a:endParaRPr>
           </a:p>
         </p:txBody>
@@ -6745,7 +6727,7 @@
         <p:spPr>
           <a:xfrm>
             <a:off x="548640" y="383760"/>
-            <a:ext cx="9142560" cy="291240"/>
+            <a:ext cx="9142200" cy="290880"/>
           </a:xfrm>
           <a:prstGeom prst="rect">
             <a:avLst/>
@@ -6791,7 +6773,7 @@
               </a:rPr>
               <a:t>Lessons and praticals</a:t>
             </a:r>
-            <a:endParaRPr b="0" lang="en-US" sz="1200" strike="noStrike" u="none">
+            <a:endParaRPr b="0" lang="fr-FR" sz="1200" strike="noStrike" u="none">
               <a:solidFill>
                 <a:srgbClr val="000000"/>
               </a:solidFill>
@@ -6811,7 +6793,7 @@
         <p:spPr>
           <a:xfrm>
             <a:off x="548640" y="658080"/>
-            <a:ext cx="11062800" cy="821520"/>
+            <a:ext cx="11062440" cy="821160"/>
           </a:xfrm>
           <a:prstGeom prst="rect">
             <a:avLst/>
@@ -6857,7 +6839,7 @@
               </a:rPr>
               <a:t>What You Will Learn and Practice</a:t>
             </a:r>
-            <a:endParaRPr b="0" lang="en-US" sz="3000" strike="noStrike" u="none">
+            <a:endParaRPr b="0" lang="fr-FR" sz="3000" strike="noStrike" u="none">
               <a:solidFill>
                 <a:srgbClr val="000000"/>
               </a:solidFill>
@@ -6877,7 +6859,7 @@
         <p:spPr>
           <a:xfrm>
             <a:off x="11185920" y="6446160"/>
-            <a:ext cx="455760" cy="272880"/>
+            <a:ext cx="455400" cy="272520"/>
           </a:xfrm>
           <a:prstGeom prst="rect">
             <a:avLst/>
@@ -6918,7 +6900,7 @@
               </a:rPr>
               <a:t>2</a:t>
             </a:r>
-            <a:endParaRPr b="0" lang="en-US" sz="900" strike="noStrike" u="none">
+            <a:endParaRPr b="0" lang="fr-FR" sz="900" strike="noStrike" u="none">
               <a:solidFill>
                 <a:srgbClr val="000000"/>
               </a:solidFill>
@@ -6938,7 +6920,7 @@
         <p:spPr>
           <a:xfrm>
             <a:off x="540000" y="1799640"/>
-            <a:ext cx="10979280" cy="4336920"/>
+            <a:ext cx="10978920" cy="4336200"/>
           </a:xfrm>
           <a:prstGeom prst="rect">
             <a:avLst/>
@@ -6989,37 +6971,31 @@
               </a:rPr>
               <a:t>Hands-on skills</a:t>
             </a:r>
-            <a:endParaRPr b="0" lang="en-US" sz="2400" strike="noStrike" u="none">
-              <a:solidFill>
-                <a:srgbClr val="000000"/>
-              </a:solidFill>
-              <a:effectLst/>
-              <a:uFillTx/>
-              <a:latin typeface="Arial"/>
-            </a:endParaRPr>
-          </a:p>
-          <a:p>
-            <a:pPr marL="343080" indent="-343080" defTabSz="343080">
-              <a:lnSpc>
-                <a:spcPct val="100000"/>
-              </a:lnSpc>
-              <a:buClr>
-                <a:srgbClr val="000000"/>
-              </a:buClr>
-              <a:buFont typeface="Arial"/>
-              <a:buChar char="•"/>
-              <a:tabLst>
-                <a:tab algn="l" pos="0"/>
-              </a:tabLst>
-            </a:pPr>
-            <a:endParaRPr b="0" lang="en-US" sz="1000" strike="noStrike" u="none">
-              <a:solidFill>
-                <a:srgbClr val="000000"/>
-              </a:solidFill>
-              <a:effectLst/>
-              <a:uFillTx/>
-              <a:latin typeface="Arial"/>
-              <a:ea typeface="Unifont"/>
+            <a:endParaRPr b="0" lang="fr-FR" sz="2400" strike="noStrike" u="none">
+              <a:solidFill>
+                <a:srgbClr val="000000"/>
+              </a:solidFill>
+              <a:effectLst/>
+              <a:uFillTx/>
+              <a:latin typeface="Arial"/>
+            </a:endParaRPr>
+          </a:p>
+          <a:p>
+            <a:pPr defTabSz="343080">
+              <a:lnSpc>
+                <a:spcPct val="100000"/>
+              </a:lnSpc>
+              <a:tabLst>
+                <a:tab algn="l" pos="0"/>
+              </a:tabLst>
+            </a:pPr>
+            <a:endParaRPr b="0" lang="fr-FR" sz="1000" strike="noStrike" u="none">
+              <a:solidFill>
+                <a:srgbClr val="000000"/>
+              </a:solidFill>
+              <a:effectLst/>
+              <a:uFillTx/>
+              <a:latin typeface="Arial"/>
             </a:endParaRPr>
           </a:p>
           <a:p>
@@ -7054,17 +7030,17 @@
               </a:rPr>
               <a:t>Generating Datasets:</a:t>
             </a:r>
-            <a:endParaRPr b="0" lang="en-US" sz="2400" strike="noStrike" u="none">
-              <a:solidFill>
-                <a:srgbClr val="000000"/>
-              </a:solidFill>
-              <a:effectLst/>
-              <a:uFillTx/>
-              <a:latin typeface="Arial"/>
-            </a:endParaRPr>
-          </a:p>
-          <a:p>
-            <a:pPr marL="360000" defTabSz="343080">
+            <a:endParaRPr b="0" lang="fr-FR" sz="2400" strike="noStrike" u="none">
+              <a:solidFill>
+                <a:srgbClr val="000000"/>
+              </a:solidFill>
+              <a:effectLst/>
+              <a:uFillTx/>
+              <a:latin typeface="Arial"/>
+            </a:endParaRPr>
+          </a:p>
+          <a:p>
+            <a:pPr marL="360000" indent="-343080" defTabSz="343080">
               <a:lnSpc>
                 <a:spcPct val="100000"/>
               </a:lnSpc>
@@ -7119,18 +7095,17 @@
               </a:rPr>
               <a:t> ranges (e.g., vary samples).</a:t>
             </a:r>
-            <a:endParaRPr b="0" lang="en-US" sz="2400" strike="noStrike" u="none">
-              <a:solidFill>
-                <a:srgbClr val="000000"/>
-              </a:solidFill>
-              <a:effectLst/>
-              <a:uFillTx/>
-              <a:latin typeface="Arial"/>
-              <a:ea typeface="Unifont"/>
-            </a:endParaRPr>
-          </a:p>
-          <a:p>
-            <a:pPr marL="360000" defTabSz="343080">
+            <a:endParaRPr b="0" lang="fr-FR" sz="2400" strike="noStrike" u="none">
+              <a:solidFill>
+                <a:srgbClr val="000000"/>
+              </a:solidFill>
+              <a:effectLst/>
+              <a:uFillTx/>
+              <a:latin typeface="Arial"/>
+            </a:endParaRPr>
+          </a:p>
+          <a:p>
+            <a:pPr marL="360000" indent="-343080" defTabSz="343080">
               <a:lnSpc>
                 <a:spcPct val="100000"/>
               </a:lnSpc>
@@ -7196,17 +7171,17 @@
                 <a:effectLst/>
                 <a:uFillTx/>
                 <a:latin typeface="Arial"/>
+                <a:ea typeface="Unifont"/>
               </a:rPr>
               <a:t> </a:t>
             </a:r>
-            <a:endParaRPr b="0" lang="en-US" sz="1000" strike="noStrike" u="none">
-              <a:solidFill>
-                <a:srgbClr val="000000"/>
-              </a:solidFill>
-              <a:effectLst/>
-              <a:uFillTx/>
-              <a:latin typeface="Arial"/>
-              <a:ea typeface="Unifont"/>
+            <a:endParaRPr b="0" lang="fr-FR" sz="1000" strike="noStrike" u="none">
+              <a:solidFill>
+                <a:srgbClr val="000000"/>
+              </a:solidFill>
+              <a:effectLst/>
+              <a:uFillTx/>
+              <a:latin typeface="Arial"/>
             </a:endParaRPr>
           </a:p>
           <a:p>
@@ -7235,18 +7210,17 @@
               </a:rPr>
               <a:t>Apply AI :</a:t>
             </a:r>
-            <a:endParaRPr b="0" lang="en-US" sz="2400" strike="noStrike" u="none">
-              <a:solidFill>
-                <a:srgbClr val="000000"/>
-              </a:solidFill>
-              <a:effectLst/>
-              <a:uFillTx/>
-              <a:latin typeface="Arial"/>
-              <a:ea typeface="Unifont"/>
-            </a:endParaRPr>
-          </a:p>
-          <a:p>
-            <a:pPr marL="360000" defTabSz="343080">
+            <a:endParaRPr b="0" lang="fr-FR" sz="2400" strike="noStrike" u="none">
+              <a:solidFill>
+                <a:srgbClr val="000000"/>
+              </a:solidFill>
+              <a:effectLst/>
+              <a:uFillTx/>
+              <a:latin typeface="Arial"/>
+            </a:endParaRPr>
+          </a:p>
+          <a:p>
+            <a:pPr marL="360000" indent="-343080" defTabSz="343080">
               <a:lnSpc>
                 <a:spcPct val="100000"/>
               </a:lnSpc>
@@ -7301,18 +7275,17 @@
               </a:rPr>
               <a:t> faster.</a:t>
             </a:r>
-            <a:endParaRPr b="0" lang="en-US" sz="2400" strike="noStrike" u="none">
-              <a:solidFill>
-                <a:srgbClr val="000000"/>
-              </a:solidFill>
-              <a:effectLst/>
-              <a:uFillTx/>
-              <a:latin typeface="Arial"/>
-              <a:ea typeface="Unifont"/>
-            </a:endParaRPr>
-          </a:p>
-          <a:p>
-            <a:pPr marL="360000" defTabSz="343080">
+            <a:endParaRPr b="0" lang="fr-FR" sz="2400" strike="noStrike" u="none">
+              <a:solidFill>
+                <a:srgbClr val="000000"/>
+              </a:solidFill>
+              <a:effectLst/>
+              <a:uFillTx/>
+              <a:latin typeface="Arial"/>
+            </a:endParaRPr>
+          </a:p>
+          <a:p>
+            <a:pPr marL="360000" indent="-343080" defTabSz="343080">
               <a:lnSpc>
                 <a:spcPct val="100000"/>
               </a:lnSpc>
@@ -7379,18 +7352,17 @@
               </a:rPr>
               <a:t> measurements.</a:t>
             </a:r>
-            <a:endParaRPr b="0" lang="en-US" sz="2400" strike="noStrike" u="none">
-              <a:solidFill>
-                <a:srgbClr val="000000"/>
-              </a:solidFill>
-              <a:effectLst/>
-              <a:uFillTx/>
-              <a:latin typeface="Arial"/>
-              <a:ea typeface="Unifont"/>
-            </a:endParaRPr>
-          </a:p>
-          <a:p>
-            <a:pPr marL="360000" defTabSz="343080">
+            <a:endParaRPr b="0" lang="fr-FR" sz="2400" strike="noStrike" u="none">
+              <a:solidFill>
+                <a:srgbClr val="000000"/>
+              </a:solidFill>
+              <a:effectLst/>
+              <a:uFillTx/>
+              <a:latin typeface="Arial"/>
+            </a:endParaRPr>
+          </a:p>
+          <a:p>
+            <a:pPr marL="360000" indent="-343080" defTabSz="343080">
               <a:lnSpc>
                 <a:spcPct val="100000"/>
               </a:lnSpc>
@@ -7433,14 +7405,13 @@
               </a:rPr>
               <a:t>parameters.</a:t>
             </a:r>
-            <a:endParaRPr b="0" lang="en-US" sz="2400" strike="noStrike" u="none">
-              <a:solidFill>
-                <a:srgbClr val="000000"/>
-              </a:solidFill>
-              <a:effectLst/>
-              <a:uFillTx/>
-              <a:latin typeface="Arial"/>
-              <a:ea typeface="Unifont"/>
+            <a:endParaRPr b="0" lang="fr-FR" sz="2400" strike="noStrike" u="none">
+              <a:solidFill>
+                <a:srgbClr val="000000"/>
+              </a:solidFill>
+              <a:effectLst/>
+              <a:uFillTx/>
+              <a:latin typeface="Arial"/>
             </a:endParaRPr>
           </a:p>
         </p:txBody>
@@ -7484,7 +7455,7 @@
         <p:spPr>
           <a:xfrm>
             <a:off x="548640" y="383760"/>
-            <a:ext cx="9142560" cy="291240"/>
+            <a:ext cx="9142200" cy="290880"/>
           </a:xfrm>
           <a:prstGeom prst="rect">
             <a:avLst/>
@@ -7530,7 +7501,7 @@
               </a:rPr>
               <a:t>Resources</a:t>
             </a:r>
-            <a:endParaRPr b="0" lang="en-US" sz="1200" strike="noStrike" u="none">
+            <a:endParaRPr b="0" lang="fr-FR" sz="1200" strike="noStrike" u="none">
               <a:solidFill>
                 <a:srgbClr val="000000"/>
               </a:solidFill>
@@ -7550,7 +7521,7 @@
         <p:spPr>
           <a:xfrm>
             <a:off x="548640" y="658080"/>
-            <a:ext cx="11062800" cy="821520"/>
+            <a:ext cx="11062440" cy="821160"/>
           </a:xfrm>
           <a:prstGeom prst="rect">
             <a:avLst/>
@@ -7596,7 +7567,7 @@
               </a:rPr>
               <a:t>What You Will Use</a:t>
             </a:r>
-            <a:endParaRPr b="0" lang="en-US" sz="3000" strike="noStrike" u="none">
+            <a:endParaRPr b="0" lang="fr-FR" sz="3000" strike="noStrike" u="none">
               <a:solidFill>
                 <a:srgbClr val="000000"/>
               </a:solidFill>
@@ -7616,7 +7587,7 @@
         <p:spPr>
           <a:xfrm>
             <a:off x="11185920" y="6446160"/>
-            <a:ext cx="455760" cy="272880"/>
+            <a:ext cx="455400" cy="272520"/>
           </a:xfrm>
           <a:prstGeom prst="rect">
             <a:avLst/>
@@ -7657,7 +7628,7 @@
               </a:rPr>
               <a:t>2</a:t>
             </a:r>
-            <a:endParaRPr b="0" lang="en-US" sz="900" strike="noStrike" u="none">
+            <a:endParaRPr b="0" lang="fr-FR" sz="900" strike="noStrike" u="none">
               <a:solidFill>
                 <a:srgbClr val="000000"/>
               </a:solidFill>
@@ -7677,7 +7648,7 @@
         <p:spPr>
           <a:xfrm>
             <a:off x="540000" y="1799640"/>
-            <a:ext cx="10979280" cy="2714040"/>
+            <a:ext cx="10978920" cy="2713320"/>
           </a:xfrm>
           <a:prstGeom prst="rect">
             <a:avLst/>
@@ -7728,7 +7699,7 @@
               </a:rPr>
               <a:t>Your Laptop</a:t>
             </a:r>
-            <a:endParaRPr b="0" lang="en-US" sz="2400" strike="noStrike" u="none">
+            <a:endParaRPr b="0" lang="fr-FR" sz="2400" strike="noStrike" u="none">
               <a:solidFill>
                 <a:srgbClr val="000000"/>
               </a:solidFill>
@@ -7768,7 +7739,7 @@
               </a:rPr>
               <a:t>High Performance Computing (MesoNET)</a:t>
             </a:r>
-            <a:endParaRPr b="0" lang="en-US" sz="2400" strike="noStrike" u="none">
+            <a:endParaRPr b="0" lang="fr-FR" sz="2400" strike="noStrike" u="none">
               <a:solidFill>
                 <a:srgbClr val="000000"/>
               </a:solidFill>
@@ -7811,27 +7782,27 @@
             <a:r>
               <a:rPr b="1" lang="fr-FR" sz="2400" strike="noStrike" u="none">
                 <a:solidFill>
+                  <a:srgbClr val="0563c1"/>
+                </a:solidFill>
+                <a:effectLst/>
+                <a:uFillTx/>
+                <a:latin typeface="Calibri"/>
+                <a:hlinkClick r:id="rId1"/>
+              </a:rPr>
+              <a:t>DARTS@SOLEIL</a:t>
+            </a:r>
+            <a:r>
+              <a:rPr b="1" lang="fr-FR" sz="2400" strike="noStrike" u="none">
+                <a:solidFill>
                   <a:srgbClr val="0000ff"/>
                 </a:solidFill>
                 <a:effectLst/>
                 <a:uFillTx/>
                 <a:latin typeface="Calibri"/>
-                <a:hlinkClick r:id="rId1"/>
-              </a:rPr>
-              <a:t>DARTS@SOLEIL</a:t>
-            </a:r>
-            <a:r>
-              <a:rPr b="1" lang="fr-FR" sz="2400" strike="noStrike" u="none">
-                <a:solidFill>
-                  <a:srgbClr val="0000ff"/>
-                </a:solidFill>
-                <a:effectLst/>
-                <a:uFillTx/>
-                <a:latin typeface="Calibri"/>
               </a:rPr>
               <a:t>)</a:t>
             </a:r>
-            <a:endParaRPr b="0" lang="en-US" sz="2400" strike="noStrike" u="none">
+            <a:endParaRPr b="0" lang="fr-FR" sz="2400" strike="noStrike" u="none">
               <a:solidFill>
                 <a:srgbClr val="000000"/>
               </a:solidFill>
@@ -7871,37 +7842,31 @@
               </a:rPr>
               <a:t>Your Brain</a:t>
             </a:r>
-            <a:endParaRPr b="0" lang="en-US" sz="2400" strike="noStrike" u="none">
-              <a:solidFill>
-                <a:srgbClr val="000000"/>
-              </a:solidFill>
-              <a:effectLst/>
-              <a:uFillTx/>
-              <a:latin typeface="Arial"/>
-            </a:endParaRPr>
-          </a:p>
-          <a:p>
-            <a:pPr marL="343080" indent="-343080" defTabSz="343080">
-              <a:lnSpc>
-                <a:spcPct val="100000"/>
-              </a:lnSpc>
-              <a:buClr>
-                <a:srgbClr val="000000"/>
-              </a:buClr>
-              <a:buFont typeface="Arial"/>
-              <a:buChar char="•"/>
-              <a:tabLst>
-                <a:tab algn="l" pos="0"/>
-              </a:tabLst>
-            </a:pPr>
-            <a:endParaRPr b="0" lang="en-US" sz="1000" strike="noStrike" u="none">
-              <a:solidFill>
-                <a:srgbClr val="000000"/>
-              </a:solidFill>
-              <a:effectLst/>
-              <a:uFillTx/>
-              <a:latin typeface="Arial"/>
-              <a:ea typeface="Unifont"/>
+            <a:endParaRPr b="0" lang="fr-FR" sz="2400" strike="noStrike" u="none">
+              <a:solidFill>
+                <a:srgbClr val="000000"/>
+              </a:solidFill>
+              <a:effectLst/>
+              <a:uFillTx/>
+              <a:latin typeface="Arial"/>
+            </a:endParaRPr>
+          </a:p>
+          <a:p>
+            <a:pPr defTabSz="343080">
+              <a:lnSpc>
+                <a:spcPct val="100000"/>
+              </a:lnSpc>
+              <a:tabLst>
+                <a:tab algn="l" pos="0"/>
+              </a:tabLst>
+            </a:pPr>
+            <a:endParaRPr b="0" lang="fr-FR" sz="1000" strike="noStrike" u="none">
+              <a:solidFill>
+                <a:srgbClr val="000000"/>
+              </a:solidFill>
+              <a:effectLst/>
+              <a:uFillTx/>
+              <a:latin typeface="Arial"/>
             </a:endParaRPr>
           </a:p>
         </p:txBody>
@@ -7952,7 +7917,7 @@
         <p:spPr>
           <a:xfrm>
             <a:off x="9410040" y="-1457640"/>
-            <a:ext cx="4753440" cy="4753440"/>
+            <a:ext cx="4753080" cy="4753080"/>
           </a:xfrm>
           <a:prstGeom prst="ellipse">
             <a:avLst/>
@@ -8000,7 +7965,7 @@
         <p:spPr>
           <a:xfrm>
             <a:off x="-1828800" y="4206240"/>
-            <a:ext cx="4204800" cy="4204800"/>
+            <a:ext cx="4204440" cy="4204440"/>
           </a:xfrm>
           <a:prstGeom prst="ellipse">
             <a:avLst/>
@@ -8048,7 +8013,7 @@
         <p:spPr>
           <a:xfrm>
             <a:off x="822960" y="2286000"/>
-            <a:ext cx="9142560" cy="1095840"/>
+            <a:ext cx="9142200" cy="1095480"/>
           </a:xfrm>
           <a:prstGeom prst="rect">
             <a:avLst/>
@@ -8089,7 +8054,7 @@
               </a:rPr>
               <a:t>Thank you</a:t>
             </a:r>
-            <a:endParaRPr b="0" lang="en-US" sz="4800" strike="noStrike" u="none">
+            <a:endParaRPr b="0" lang="fr-FR" sz="4800" strike="noStrike" u="none">
               <a:solidFill>
                 <a:srgbClr val="ffffff"/>
               </a:solidFill>
@@ -8109,7 +8074,7 @@
         <p:spPr>
           <a:xfrm>
             <a:off x="822960" y="3246120"/>
-            <a:ext cx="9142560" cy="638640"/>
+            <a:ext cx="9142200" cy="638280"/>
           </a:xfrm>
           <a:prstGeom prst="rect">
             <a:avLst/>
@@ -8150,7 +8115,7 @@
               </a:rPr>
               <a:t>Questions?</a:t>
             </a:r>
-            <a:endParaRPr b="0" lang="en-US" sz="2000" strike="noStrike" u="none">
+            <a:endParaRPr b="0" lang="fr-FR" sz="2000" strike="noStrike" u="none">
               <a:solidFill>
                 <a:srgbClr val="ffffff"/>
               </a:solidFill>
@@ -8170,7 +8135,7 @@
         <p:spPr>
           <a:xfrm>
             <a:off x="822960" y="4297680"/>
-            <a:ext cx="1415880" cy="309600"/>
+            <a:ext cx="1415520" cy="309240"/>
           </a:xfrm>
           <a:prstGeom prst="roundRect">
             <a:avLst>
@@ -8220,7 +8185,7 @@
         <p:spPr>
           <a:xfrm>
             <a:off x="822960" y="4297680"/>
-            <a:ext cx="1415880" cy="309600"/>
+            <a:ext cx="1415520" cy="309240"/>
           </a:xfrm>
           <a:prstGeom prst="rect">
             <a:avLst/>
@@ -8261,7 +8226,7 @@
               </a:rPr>
               <a:t>mcstas.org</a:t>
             </a:r>
-            <a:endParaRPr b="0" lang="en-US" sz="1100" strike="noStrike" u="none">
+            <a:endParaRPr b="0" lang="fr-FR" sz="1100" strike="noStrike" u="none">
               <a:solidFill>
                 <a:srgbClr val="ffffff"/>
               </a:solidFill>
@@ -8281,7 +8246,7 @@
         <p:spPr>
           <a:xfrm>
             <a:off x="2377440" y="4297680"/>
-            <a:ext cx="1415880" cy="309600"/>
+            <a:ext cx="1415520" cy="309240"/>
           </a:xfrm>
           <a:prstGeom prst="roundRect">
             <a:avLst>
@@ -8331,7 +8296,7 @@
         <p:spPr>
           <a:xfrm>
             <a:off x="2377440" y="4297680"/>
-            <a:ext cx="1415880" cy="309600"/>
+            <a:ext cx="1415520" cy="309240"/>
           </a:xfrm>
           <a:prstGeom prst="rect">
             <a:avLst/>
@@ -8372,7 +8337,7 @@
               </a:rPr>
               <a:t>mcxtrace.org</a:t>
             </a:r>
-            <a:endParaRPr b="0" lang="en-US" sz="1100" strike="noStrike" u="none">
+            <a:endParaRPr b="0" lang="fr-FR" sz="1100" strike="noStrike" u="none">
               <a:solidFill>
                 <a:srgbClr val="ffffff"/>
               </a:solidFill>
@@ -8435,7 +8400,7 @@
         <p:spPr>
           <a:xfrm>
             <a:off x="822960" y="5897880"/>
-            <a:ext cx="7313760" cy="318600"/>
+            <a:ext cx="7313400" cy="318240"/>
           </a:xfrm>
           <a:prstGeom prst="rect">
             <a:avLst/>
@@ -8476,7 +8441,7 @@
               </a:rPr>
               <a:t>Peter Willendrup   ·   pkwi@fysik.dtu.dk   ·   DTU Physics</a:t>
             </a:r>
-            <a:endParaRPr b="0" lang="en-US" sz="1250" strike="noStrike" u="none">
+            <a:endParaRPr b="0" lang="fr-FR" sz="1250" strike="noStrike" u="none">
               <a:solidFill>
                 <a:srgbClr val="ffffff"/>
               </a:solidFill>
@@ -8496,7 +8461,7 @@
         <p:spPr>
           <a:xfrm>
             <a:off x="548640" y="6446520"/>
-            <a:ext cx="6399360" cy="272880"/>
+            <a:ext cx="6399000" cy="272520"/>
           </a:xfrm>
           <a:prstGeom prst="rect">
             <a:avLst/>
@@ -8537,7 +8502,7 @@
               </a:rPr>
               <a:t>{presentation title</a:t>
             </a:r>
-            <a:endParaRPr b="0" lang="en-US" sz="900" strike="noStrike" u="none">
+            <a:endParaRPr b="0" lang="fr-FR" sz="900" strike="noStrike" u="none">
               <a:solidFill>
                 <a:srgbClr val="ffffff"/>
               </a:solidFill>
@@ -8557,7 +8522,7 @@
         <p:spPr>
           <a:xfrm>
             <a:off x="11185920" y="6446520"/>
-            <a:ext cx="455760" cy="272880"/>
+            <a:ext cx="455400" cy="272520"/>
           </a:xfrm>
           <a:prstGeom prst="rect">
             <a:avLst/>
@@ -8598,7 +8563,7 @@
               </a:rPr>
               <a:t>17</a:t>
             </a:r>
-            <a:endParaRPr b="0" lang="en-US" sz="900" strike="noStrike" u="none">
+            <a:endParaRPr b="0" lang="fr-FR" sz="900" strike="noStrike" u="none">
               <a:solidFill>
                 <a:srgbClr val="ffffff"/>
               </a:solidFill>
@@ -8618,7 +8583,7 @@
         <p:spPr>
           <a:xfrm>
             <a:off x="6603840" y="4165560"/>
-            <a:ext cx="4951440" cy="1573200"/>
+            <a:ext cx="4951080" cy="1572840"/>
           </a:xfrm>
           <a:prstGeom prst="roundRect">
             <a:avLst>
@@ -8676,7 +8641,7 @@
         <p:spPr>
           <a:xfrm>
             <a:off x="6921360" y="4368960"/>
-            <a:ext cx="4316400" cy="227160"/>
+            <a:ext cx="4316040" cy="226800"/>
           </a:xfrm>
           <a:prstGeom prst="rect">
             <a:avLst/>
@@ -8713,7 +8678,7 @@
               </a:rPr>
               <a:t>SUPPORTED BY</a:t>
             </a:r>
-            <a:endParaRPr b="0" lang="en-US" sz="1100" strike="noStrike" u="none">
+            <a:endParaRPr b="0" lang="fr-FR" sz="1100" strike="noStrike" u="none">
               <a:solidFill>
                 <a:srgbClr val="ffffff"/>
               </a:solidFill>
@@ -8737,7 +8702,7 @@
         <p:spPr>
           <a:xfrm>
             <a:off x="6921360" y="4749840"/>
-            <a:ext cx="4316400" cy="639000"/>
+            <a:ext cx="4316040" cy="638640"/>
           </a:xfrm>
           <a:prstGeom prst="rect">
             <a:avLst/>
@@ -8762,7 +8727,7 @@
         <p:spPr>
           <a:xfrm>
             <a:off x="10375920" y="355680"/>
-            <a:ext cx="1268640" cy="650160"/>
+            <a:ext cx="1268280" cy="649800"/>
           </a:xfrm>
           <a:prstGeom prst="rect">
             <a:avLst/>
@@ -8782,7 +8747,7 @@
         <p:spPr>
           <a:xfrm>
             <a:off x="7375680" y="2105640"/>
-            <a:ext cx="3808440" cy="1497240"/>
+            <a:ext cx="3808080" cy="1496880"/>
           </a:xfrm>
           <a:prstGeom prst="roundRect">
             <a:avLst>
@@ -8840,9 +8805,9 @@
         <p:grpSpPr>
           <a:xfrm>
             <a:off x="7882560" y="2194200"/>
-            <a:ext cx="2795040" cy="1320120"/>
+            <a:ext cx="2794680" cy="1319760"/>
             <a:chOff x="7882560" y="2194200"/>
-            <a:chExt cx="2795040" cy="1320120"/>
+            <a:chExt cx="2794680" cy="1319760"/>
           </a:xfrm>
         </p:grpSpPr>
         <p:grpSp>
@@ -8854,9 +8819,9 @@
           <p:grpSpPr>
             <a:xfrm>
               <a:off x="9289440" y="2194200"/>
-              <a:ext cx="1388160" cy="1257120"/>
+              <a:ext cx="1387800" cy="1256760"/>
               <a:chOff x="9289440" y="2194200"/>
-              <a:chExt cx="1388160" cy="1257120"/>
+              <a:chExt cx="1387800" cy="1256760"/>
             </a:xfrm>
           </p:grpSpPr>
           <p:pic>
@@ -8873,7 +8838,7 @@
             <p:spPr>
               <a:xfrm>
                 <a:off x="9339120" y="2194200"/>
-                <a:ext cx="1293120" cy="774720"/>
+                <a:ext cx="1292760" cy="774360"/>
               </a:xfrm>
               <a:prstGeom prst="rect">
                 <a:avLst/>
@@ -8897,7 +8862,7 @@
             <p:spPr>
               <a:xfrm>
                 <a:off x="9289440" y="2922840"/>
-                <a:ext cx="961920" cy="464040"/>
+                <a:ext cx="961560" cy="463680"/>
               </a:xfrm>
               <a:prstGeom prst="rect">
                 <a:avLst/>
@@ -8921,7 +8886,7 @@
             <p:spPr>
               <a:xfrm>
                 <a:off x="10325160" y="2931480"/>
-                <a:ext cx="352440" cy="519840"/>
+                <a:ext cx="352080" cy="519480"/>
               </a:xfrm>
               <a:prstGeom prst="rect">
                 <a:avLst/>
@@ -8946,7 +8911,7 @@
           <p:spPr>
             <a:xfrm>
               <a:off x="7882560" y="2198880"/>
-              <a:ext cx="1293120" cy="1315440"/>
+              <a:ext cx="1292760" cy="1315080"/>
             </a:xfrm>
             <a:prstGeom prst="rect">
               <a:avLst/>
@@ -9004,7 +8969,7 @@
         <p:spPr>
           <a:xfrm>
             <a:off x="548640" y="384120"/>
-            <a:ext cx="9142560" cy="291240"/>
+            <a:ext cx="9142200" cy="290880"/>
           </a:xfrm>
           <a:prstGeom prst="rect">
             <a:avLst/>
@@ -9044,7 +9009,7 @@
               </a:rPr>
               <a:t>TARGET</a:t>
             </a:r>
-            <a:endParaRPr b="0" lang="en-US" sz="1200" strike="noStrike" u="none">
+            <a:endParaRPr b="0" lang="fr-FR" sz="1200" strike="noStrike" u="none">
               <a:solidFill>
                 <a:srgbClr val="000000"/>
               </a:solidFill>
@@ -9064,7 +9029,7 @@
         <p:spPr>
           <a:xfrm>
             <a:off x="548640" y="658440"/>
-            <a:ext cx="11062800" cy="821520"/>
+            <a:ext cx="11062440" cy="821160"/>
           </a:xfrm>
           <a:prstGeom prst="rect">
             <a:avLst/>
@@ -9110,7 +9075,7 @@
               </a:rPr>
               <a:t>This school’s objective</a:t>
             </a:r>
-            <a:endParaRPr b="0" lang="en-US" sz="3000" strike="noStrike" u="none">
+            <a:endParaRPr b="0" lang="fr-FR" sz="3000" strike="noStrike" u="none">
               <a:solidFill>
                 <a:srgbClr val="000000"/>
               </a:solidFill>
@@ -9130,7 +9095,7 @@
         <p:spPr>
           <a:xfrm>
             <a:off x="11185920" y="6446520"/>
-            <a:ext cx="455760" cy="272880"/>
+            <a:ext cx="455400" cy="272520"/>
           </a:xfrm>
           <a:prstGeom prst="rect">
             <a:avLst/>
@@ -9171,7 +9136,7 @@
               </a:rPr>
               <a:t>2</a:t>
             </a:r>
-            <a:endParaRPr b="0" lang="en-US" sz="900" strike="noStrike" u="none">
+            <a:endParaRPr b="0" lang="fr-FR" sz="900" strike="noStrike" u="none">
               <a:solidFill>
                 <a:srgbClr val="000000"/>
               </a:solidFill>
@@ -9191,7 +9156,7 @@
         <p:spPr>
           <a:xfrm>
             <a:off x="540000" y="1480680"/>
-            <a:ext cx="11519280" cy="3015720"/>
+            <a:ext cx="11518920" cy="3015000"/>
           </a:xfrm>
           <a:prstGeom prst="rect">
             <a:avLst/>
@@ -9234,7 +9199,7 @@
               </a:rPr>
               <a:t>Explore how AI can leverage simulated photon and neutron datasets to:</a:t>
             </a:r>
-            <a:endParaRPr b="0" lang="en-US" sz="2400" strike="noStrike" u="none">
+            <a:endParaRPr b="0" lang="fr-FR" sz="2400" strike="noStrike" u="none">
               <a:solidFill>
                 <a:srgbClr val="000000"/>
               </a:solidFill>
@@ -9255,7 +9220,7 @@
                 <a:tab algn="l" pos="0"/>
               </a:tabLst>
             </a:pPr>
-            <a:endParaRPr b="0" lang="en-US" sz="2400" strike="noStrike" u="none">
+            <a:endParaRPr b="0" lang="fr-FR" sz="2400" strike="noStrike" u="none">
               <a:solidFill>
                 <a:srgbClr val="000000"/>
               </a:solidFill>
@@ -9292,7 +9257,7 @@
               </a:rPr>
               <a:t>Solve inverse problems (measurement → parameters)</a:t>
             </a:r>
-            <a:endParaRPr b="0" lang="en-US" sz="2400" strike="noStrike" u="none">
+            <a:endParaRPr b="0" lang="fr-FR" sz="2400" strike="noStrike" u="none">
               <a:solidFill>
                 <a:srgbClr val="000000"/>
               </a:solidFill>
@@ -9329,7 +9294,7 @@
               </a:rPr>
               <a:t>Optimize experiments (find best parameters)</a:t>
             </a:r>
-            <a:endParaRPr b="0" lang="en-US" sz="2400" strike="noStrike" u="none">
+            <a:endParaRPr b="0" lang="fr-FR" sz="2400" strike="noStrike" u="none">
               <a:solidFill>
                 <a:srgbClr val="000000"/>
               </a:solidFill>
@@ -9366,7 +9331,7 @@
               </a:rPr>
               <a:t>Train surrogate models (parameters → measurement)</a:t>
             </a:r>
-            <a:endParaRPr b="0" lang="en-US" sz="2400" strike="noStrike" u="none">
+            <a:endParaRPr b="0" lang="fr-FR" sz="2400" strike="noStrike" u="none">
               <a:solidFill>
                 <a:srgbClr val="000000"/>
               </a:solidFill>
@@ -9387,7 +9352,7 @@
                 <a:tab algn="l" pos="0"/>
               </a:tabLst>
             </a:pPr>
-            <a:endParaRPr b="0" lang="en-US" sz="2400" strike="noStrike" u="none">
+            <a:endParaRPr b="0" lang="fr-FR" sz="2400" strike="noStrike" u="none">
               <a:solidFill>
                 <a:srgbClr val="000000"/>
               </a:solidFill>
@@ -9419,7 +9384,7 @@
               </a:rPr>
               <a:t>For all this, we encourage you to use AI chats/agents.</a:t>
             </a:r>
-            <a:endParaRPr b="0" lang="en-US" sz="2400" strike="noStrike" u="none">
+            <a:endParaRPr b="0" lang="fr-FR" sz="2400" strike="noStrike" u="none">
               <a:solidFill>
                 <a:srgbClr val="000000"/>
               </a:solidFill>
@@ -9476,7 +9441,7 @@
         <p:spPr>
           <a:xfrm>
             <a:off x="548640" y="384120"/>
-            <a:ext cx="9142560" cy="291240"/>
+            <a:ext cx="9142200" cy="290880"/>
           </a:xfrm>
           <a:prstGeom prst="rect">
             <a:avLst/>
@@ -9516,7 +9481,7 @@
               </a:rPr>
               <a:t>X/n</a:t>
             </a:r>
-            <a:endParaRPr b="0" lang="en-US" sz="1200" strike="noStrike" u="none">
+            <a:endParaRPr b="0" lang="fr-FR" sz="1200" strike="noStrike" u="none">
               <a:solidFill>
                 <a:srgbClr val="000000"/>
               </a:solidFill>
@@ -9536,7 +9501,7 @@
         <p:spPr>
           <a:xfrm>
             <a:off x="548640" y="658440"/>
-            <a:ext cx="11062800" cy="821520"/>
+            <a:ext cx="11062440" cy="821160"/>
           </a:xfrm>
           <a:prstGeom prst="rect">
             <a:avLst/>
@@ -9582,7 +9547,7 @@
               </a:rPr>
               <a:t>Why "Photons and Neutrons"?</a:t>
             </a:r>
-            <a:endParaRPr b="0" lang="en-US" sz="3000" strike="noStrike" u="none">
+            <a:endParaRPr b="0" lang="fr-FR" sz="3000" strike="noStrike" u="none">
               <a:solidFill>
                 <a:srgbClr val="000000"/>
               </a:solidFill>
@@ -9602,7 +9567,7 @@
         <p:spPr>
           <a:xfrm>
             <a:off x="11185920" y="6446520"/>
-            <a:ext cx="455760" cy="272880"/>
+            <a:ext cx="455400" cy="272520"/>
           </a:xfrm>
           <a:prstGeom prst="rect">
             <a:avLst/>
@@ -9643,7 +9608,7 @@
               </a:rPr>
               <a:t>2</a:t>
             </a:r>
-            <a:endParaRPr b="0" lang="en-US" sz="900" strike="noStrike" u="none">
+            <a:endParaRPr b="0" lang="fr-FR" sz="900" strike="noStrike" u="none">
               <a:solidFill>
                 <a:srgbClr val="000000"/>
               </a:solidFill>
@@ -9663,7 +9628,7 @@
         <p:spPr>
           <a:xfrm>
             <a:off x="476280" y="1930680"/>
-            <a:ext cx="11238840" cy="3381480"/>
+            <a:ext cx="11238480" cy="3381480"/>
           </a:xfrm>
           <a:prstGeom prst="rect">
             <a:avLst/>
@@ -9700,7 +9665,7 @@
               </a:rPr>
               <a:t>Shared X/n Physics and Simulation Capabilities</a:t>
             </a:r>
-            <a:endParaRPr b="0" lang="en-US" sz="2400" strike="noStrike" u="none">
+            <a:endParaRPr b="0" lang="fr-FR" sz="2400" strike="noStrike" u="none">
               <a:solidFill>
                 <a:srgbClr val="000000"/>
               </a:solidFill>
@@ -9715,7 +9680,7 @@
                 <a:spcPct val="100000"/>
               </a:lnSpc>
             </a:pPr>
-            <a:endParaRPr b="0" lang="en-US" sz="2400" strike="noStrike" u="none">
+            <a:endParaRPr b="0" lang="fr-FR" sz="2400" strike="noStrike" u="none">
               <a:solidFill>
                 <a:srgbClr val="000000"/>
               </a:solidFill>
@@ -9755,7 +9720,7 @@
             <a:br>
               <a:rPr sz="2400"/>
             </a:br>
-            <a:endParaRPr b="0" lang="en-US" sz="2400" strike="noStrike" u="none">
+            <a:endParaRPr b="0" lang="fr-FR" sz="2400" strike="noStrike" u="none">
               <a:solidFill>
                 <a:srgbClr val="000000"/>
               </a:solidFill>
@@ -9797,7 +9762,7 @@
               </a:rPr>
               <a:t>: Energy transfer to the material (e.g., photoelectric effect for X-rays, neutron capture).</a:t>
             </a:r>
-            <a:endParaRPr b="0" lang="en-US" sz="2100" strike="noStrike" u="none">
+            <a:endParaRPr b="0" lang="fr-FR" sz="2100" strike="noStrike" u="none">
               <a:solidFill>
                 <a:srgbClr val="000000"/>
               </a:solidFill>
@@ -9839,17 +9804,17 @@
               </a:rPr>
               <a:t>:</a:t>
             </a:r>
-            <a:endParaRPr b="0" lang="en-US" sz="2100" strike="noStrike" u="none">
-              <a:solidFill>
-                <a:srgbClr val="000000"/>
-              </a:solidFill>
-              <a:effectLst/>
-              <a:uFillTx/>
-              <a:latin typeface="Arial"/>
-            </a:endParaRPr>
-          </a:p>
-          <a:p>
-            <a:pPr marL="360000">
+            <a:endParaRPr b="0" lang="fr-FR" sz="2100" strike="noStrike" u="none">
+              <a:solidFill>
+                <a:srgbClr val="000000"/>
+              </a:solidFill>
+              <a:effectLst/>
+              <a:uFillTx/>
+              <a:latin typeface="Arial"/>
+            </a:endParaRPr>
+          </a:p>
+          <a:p>
+            <a:pPr marL="360000" indent="-216000">
               <a:lnSpc>
                 <a:spcPct val="100000"/>
               </a:lnSpc>
@@ -9881,18 +9846,17 @@
               </a:rPr>
               <a:t>: Structure analysis (e.g., Bragg diffraction for X-rays, neutron diffraction).</a:t>
             </a:r>
-            <a:endParaRPr b="0" lang="en-US" sz="1800" strike="noStrike" u="none">
-              <a:solidFill>
-                <a:srgbClr val="000000"/>
-              </a:solidFill>
-              <a:effectLst/>
-              <a:uFillTx/>
-              <a:latin typeface="Arial"/>
-              <a:ea typeface="Unifont"/>
-            </a:endParaRPr>
-          </a:p>
-          <a:p>
-            <a:pPr marL="360000">
+            <a:endParaRPr b="0" lang="fr-FR" sz="1800" strike="noStrike" u="none">
+              <a:solidFill>
+                <a:srgbClr val="000000"/>
+              </a:solidFill>
+              <a:effectLst/>
+              <a:uFillTx/>
+              <a:latin typeface="Arial"/>
+            </a:endParaRPr>
+          </a:p>
+          <a:p>
+            <a:pPr marL="360000" indent="-216000">
               <a:lnSpc>
                 <a:spcPct val="100000"/>
               </a:lnSpc>
@@ -9924,14 +9888,13 @@
               </a:rPr>
               <a:t>: Dynamics analysis (e.g., Raman scattering for X-rays, neutron inelastic scattering).</a:t>
             </a:r>
-            <a:endParaRPr b="0" lang="en-US" sz="1800" strike="noStrike" u="none">
-              <a:solidFill>
-                <a:srgbClr val="000000"/>
-              </a:solidFill>
-              <a:effectLst/>
-              <a:uFillTx/>
-              <a:latin typeface="Arial"/>
-              <a:ea typeface="Unifont"/>
+            <a:endParaRPr b="0" lang="fr-FR" sz="1800" strike="noStrike" u="none">
+              <a:solidFill>
+                <a:srgbClr val="000000"/>
+              </a:solidFill>
+              <a:effectLst/>
+              <a:uFillTx/>
+              <a:latin typeface="Arial"/>
             </a:endParaRPr>
           </a:p>
           <a:p>
@@ -9967,7 +9930,7 @@
               </a:rPr>
               <a:t>: Time-resolved studies (e.g., fluorescence, neutron activation).</a:t>
             </a:r>
-            <a:endParaRPr b="0" lang="en-US" sz="2100" strike="noStrike" u="none">
+            <a:endParaRPr b="0" lang="fr-FR" sz="2100" strike="noStrike" u="none">
               <a:solidFill>
                 <a:srgbClr val="000000"/>
               </a:solidFill>
@@ -10024,7 +9987,7 @@
         <p:spPr>
           <a:xfrm>
             <a:off x="548640" y="384120"/>
-            <a:ext cx="9142560" cy="291240"/>
+            <a:ext cx="9142200" cy="290880"/>
           </a:xfrm>
           <a:prstGeom prst="rect">
             <a:avLst/>
@@ -10064,7 +10027,7 @@
               </a:rPr>
               <a:t>X/n</a:t>
             </a:r>
-            <a:endParaRPr b="0" lang="en-US" sz="1200" strike="noStrike" u="none">
+            <a:endParaRPr b="0" lang="fr-FR" sz="1200" strike="noStrike" u="none">
               <a:solidFill>
                 <a:srgbClr val="000000"/>
               </a:solidFill>
@@ -10084,7 +10047,7 @@
         <p:spPr>
           <a:xfrm>
             <a:off x="548640" y="658440"/>
-            <a:ext cx="11062800" cy="821520"/>
+            <a:ext cx="11062440" cy="821160"/>
           </a:xfrm>
           <a:prstGeom prst="rect">
             <a:avLst/>
@@ -10130,7 +10093,7 @@
               </a:rPr>
               <a:t>Why "Photons and Neutrons"?</a:t>
             </a:r>
-            <a:endParaRPr b="0" lang="en-US" sz="3000" strike="noStrike" u="none">
+            <a:endParaRPr b="0" lang="fr-FR" sz="3000" strike="noStrike" u="none">
               <a:solidFill>
                 <a:srgbClr val="000000"/>
               </a:solidFill>
@@ -10150,7 +10113,7 @@
         <p:spPr>
           <a:xfrm>
             <a:off x="11185920" y="6446520"/>
-            <a:ext cx="455760" cy="272880"/>
+            <a:ext cx="455400" cy="272520"/>
           </a:xfrm>
           <a:prstGeom prst="rect">
             <a:avLst/>
@@ -10191,7 +10154,7 @@
               </a:rPr>
               <a:t>2</a:t>
             </a:r>
-            <a:endParaRPr b="0" lang="en-US" sz="900" strike="noStrike" u="none">
+            <a:endParaRPr b="0" lang="fr-FR" sz="900" strike="noStrike" u="none">
               <a:solidFill>
                 <a:srgbClr val="000000"/>
               </a:solidFill>
@@ -10211,7 +10174,7 @@
         <p:spPr>
           <a:xfrm>
             <a:off x="540000" y="1800000"/>
-            <a:ext cx="11118600" cy="4113000"/>
+            <a:ext cx="11118240" cy="4494600"/>
           </a:xfrm>
           <a:prstGeom prst="rect">
             <a:avLst/>
@@ -10232,6 +10195,107 @@
             <a:spAutoFit/>
           </a:bodyPr>
           <a:p>
+            <a:pPr defTabSz="343080">
+              <a:lnSpc>
+                <a:spcPct val="100000"/>
+              </a:lnSpc>
+              <a:spcBef>
+                <a:spcPts val="479"/>
+              </a:spcBef>
+              <a:tabLst>
+                <a:tab algn="l" pos="0"/>
+              </a:tabLst>
+            </a:pPr>
+            <a:r>
+              <a:rPr b="1" lang="fr-FR" sz="2400" strike="noStrike" u="none">
+                <a:solidFill>
+                  <a:srgbClr val="0000ff"/>
+                </a:solidFill>
+                <a:effectLst/>
+                <a:uFillTx/>
+                <a:latin typeface="Calibri"/>
+              </a:rPr>
+              <a:t>The Real World</a:t>
+            </a:r>
+            <a:r>
+              <a:rPr b="0" lang="fr-FR" sz="2400" strike="noStrike" u="none">
+                <a:solidFill>
+                  <a:schemeClr val="dk1"/>
+                </a:solidFill>
+                <a:effectLst/>
+                <a:uFillTx/>
+                <a:latin typeface="Calibri"/>
+              </a:rPr>
+              <a:t>:</a:t>
+            </a:r>
+            <a:endParaRPr b="0" lang="fr-FR" sz="2400" strike="noStrike" u="none">
+              <a:solidFill>
+                <a:srgbClr val="000000"/>
+              </a:solidFill>
+              <a:effectLst/>
+              <a:uFillTx/>
+              <a:latin typeface="Arial"/>
+            </a:endParaRPr>
+          </a:p>
+          <a:p>
+            <a:pPr lvl="1" marL="685800" indent="-343080" defTabSz="343080">
+              <a:lnSpc>
+                <a:spcPct val="100000"/>
+              </a:lnSpc>
+              <a:spcBef>
+                <a:spcPts val="420"/>
+              </a:spcBef>
+              <a:buClr>
+                <a:srgbClr val="000000"/>
+              </a:buClr>
+              <a:buFont typeface="Arial"/>
+              <a:buChar char="–"/>
+              <a:tabLst>
+                <a:tab algn="l" pos="0"/>
+              </a:tabLst>
+            </a:pPr>
+            <a:r>
+              <a:rPr b="1" lang="fr-FR" sz="2100" strike="noStrike" u="none">
+                <a:solidFill>
+                  <a:srgbClr val="ff00ff"/>
+                </a:solidFill>
+                <a:effectLst/>
+                <a:uFillTx/>
+                <a:latin typeface="Courier New"/>
+              </a:rPr>
+              <a:t>Parameters → [Instrument] → “Measurement”</a:t>
+            </a:r>
+            <a:endParaRPr b="0" lang="fr-FR" sz="2100" strike="noStrike" u="none">
+              <a:solidFill>
+                <a:srgbClr val="000000"/>
+              </a:solidFill>
+              <a:effectLst/>
+              <a:uFillTx/>
+              <a:latin typeface="Arial"/>
+            </a:endParaRPr>
+          </a:p>
+          <a:p>
+            <a:pPr defTabSz="343080">
+              <a:lnSpc>
+                <a:spcPct val="100000"/>
+              </a:lnSpc>
+              <a:spcBef>
+                <a:spcPts val="420"/>
+              </a:spcBef>
+              <a:tabLst>
+                <a:tab algn="l" pos="0"/>
+              </a:tabLst>
+            </a:pPr>
+            <a:endParaRPr b="0" lang="fr-FR" sz="2100" strike="noStrike" u="none">
+              <a:solidFill>
+                <a:srgbClr val="000000"/>
+              </a:solidFill>
+              <a:effectLst/>
+              <a:uFillTx/>
+              <a:latin typeface="Arial"/>
+            </a:endParaRPr>
+          </a:p>
+          <a:p>
             <a:pPr>
               <a:lnSpc>
                 <a:spcPct val="100000"/>
@@ -10259,10 +10323,7 @@
               </a:rPr>
               <a:t>:</a:t>
             </a:r>
-            <a:br>
-              <a:rPr sz="2400"/>
-            </a:br>
-            <a:endParaRPr b="0" lang="en-US" sz="2400" strike="noStrike" u="none">
+            <a:endParaRPr b="0" lang="fr-FR" sz="2400" strike="noStrike" u="none">
               <a:solidFill>
                 <a:srgbClr val="000000"/>
               </a:solidFill>
@@ -10304,7 +10365,7 @@
               </a:rPr>
               <a:t>: Monte Carlo simulator for neutron scattering instruments.</a:t>
             </a:r>
-            <a:endParaRPr b="0" lang="en-US" sz="2100" strike="noStrike" u="none">
+            <a:endParaRPr b="0" lang="fr-FR" sz="2100" strike="noStrike" u="none">
               <a:solidFill>
                 <a:srgbClr val="000000"/>
               </a:solidFill>
@@ -10346,7 +10407,7 @@
               </a:rPr>
               <a:t>: Monte Carlo simulator for X-ray instruments.</a:t>
             </a:r>
-            <a:endParaRPr b="0" lang="en-US" sz="2100" strike="noStrike" u="none">
+            <a:endParaRPr b="0" lang="fr-FR" sz="2100" strike="noStrike" u="none">
               <a:solidFill>
                 <a:srgbClr val="000000"/>
               </a:solidFill>
@@ -10377,7 +10438,7 @@
               </a:rPr>
               <a:t>Both enable realistic modeling of beamlines, detectors, and sample interactions.</a:t>
             </a:r>
-            <a:endParaRPr b="0" lang="en-US" sz="2100" strike="noStrike" u="none">
+            <a:endParaRPr b="0" lang="fr-FR" sz="2100" strike="noStrike" u="none">
               <a:solidFill>
                 <a:srgbClr val="000000"/>
               </a:solidFill>
@@ -10392,7 +10453,7 @@
                 <a:spcPct val="100000"/>
               </a:lnSpc>
             </a:pPr>
-            <a:endParaRPr b="0" lang="en-US" sz="2100" strike="noStrike" u="none">
+            <a:endParaRPr b="0" lang="fr-FR" sz="2100" strike="noStrike" u="none">
               <a:solidFill>
                 <a:srgbClr val="000000"/>
               </a:solidFill>
@@ -10429,10 +10490,7 @@
               </a:rPr>
               <a:t>:</a:t>
             </a:r>
-            <a:br>
-              <a:rPr sz="2400"/>
-            </a:br>
-            <a:endParaRPr b="0" lang="en-US" sz="2400" strike="noStrike" u="none">
+            <a:endParaRPr b="0" lang="fr-FR" sz="2400" strike="noStrike" u="none">
               <a:solidFill>
                 <a:srgbClr val="000000"/>
               </a:solidFill>
@@ -10474,7 +10532,7 @@
               </a:rPr>
               <a:t>: Capture complex instrument geometries and material responses.</a:t>
             </a:r>
-            <a:endParaRPr b="0" lang="en-US" sz="2100" strike="noStrike" u="none">
+            <a:endParaRPr b="0" lang="fr-FR" sz="2100" strike="noStrike" u="none">
               <a:solidFill>
                 <a:srgbClr val="000000"/>
               </a:solidFill>
@@ -10516,7 +10574,7 @@
               </a:rPr>
               <a:t>: Test hypothetical setups.</a:t>
             </a:r>
-            <a:endParaRPr b="0" lang="en-US" sz="2100" strike="noStrike" u="none">
+            <a:endParaRPr b="0" lang="fr-FR" sz="2100" strike="noStrike" u="none">
               <a:solidFill>
                 <a:srgbClr val="000000"/>
               </a:solidFill>
@@ -10558,7 +10616,7 @@
               </a:rPr>
               <a:t>: Avoid expensive trial-and-error on real instruments/BL.</a:t>
             </a:r>
-            <a:endParaRPr b="0" lang="en-US" sz="2100" strike="noStrike" u="none">
+            <a:endParaRPr b="0" lang="fr-FR" sz="2100" strike="noStrike" u="none">
               <a:solidFill>
                 <a:srgbClr val="000000"/>
               </a:solidFill>
@@ -10573,7 +10631,7 @@
                 <a:spcPct val="100000"/>
               </a:lnSpc>
             </a:pPr>
-            <a:endParaRPr b="0" lang="en-US" sz="2100" strike="noStrike" u="none">
+            <a:endParaRPr b="0" lang="fr-FR" sz="2100" strike="noStrike" u="none">
               <a:solidFill>
                 <a:srgbClr val="000000"/>
               </a:solidFill>
@@ -10630,7 +10688,7 @@
         <p:spPr>
           <a:xfrm>
             <a:off x="548640" y="384120"/>
-            <a:ext cx="9142560" cy="291240"/>
+            <a:ext cx="9142200" cy="290880"/>
           </a:xfrm>
           <a:prstGeom prst="rect">
             <a:avLst/>
@@ -10670,7 +10728,7 @@
               </a:rPr>
               <a:t>Realistic datasets</a:t>
             </a:r>
-            <a:endParaRPr b="0" lang="en-US" sz="1200" strike="noStrike" u="none">
+            <a:endParaRPr b="0" lang="fr-FR" sz="1200" strike="noStrike" u="none">
               <a:solidFill>
                 <a:srgbClr val="000000"/>
               </a:solidFill>
@@ -10690,7 +10748,7 @@
         <p:spPr>
           <a:xfrm>
             <a:off x="548640" y="658440"/>
-            <a:ext cx="11062800" cy="821520"/>
+            <a:ext cx="11062440" cy="821160"/>
           </a:xfrm>
           <a:prstGeom prst="rect">
             <a:avLst/>
@@ -10736,7 +10794,7 @@
               </a:rPr>
               <a:t>Why Realistic AI Datasets?</a:t>
             </a:r>
-            <a:endParaRPr b="0" lang="en-US" sz="3000" strike="noStrike" u="none">
+            <a:endParaRPr b="0" lang="fr-FR" sz="3000" strike="noStrike" u="none">
               <a:solidFill>
                 <a:srgbClr val="000000"/>
               </a:solidFill>
@@ -10756,7 +10814,7 @@
         <p:spPr>
           <a:xfrm>
             <a:off x="11185920" y="6446520"/>
-            <a:ext cx="455760" cy="272880"/>
+            <a:ext cx="455400" cy="272520"/>
           </a:xfrm>
           <a:prstGeom prst="rect">
             <a:avLst/>
@@ -10797,7 +10855,7 @@
               </a:rPr>
               <a:t>2</a:t>
             </a:r>
-            <a:endParaRPr b="0" lang="en-US" sz="900" strike="noStrike" u="none">
+            <a:endParaRPr b="0" lang="fr-FR" sz="900" strike="noStrike" u="none">
               <a:solidFill>
                 <a:srgbClr val="000000"/>
               </a:solidFill>
@@ -10817,7 +10875,7 @@
         <p:spPr>
           <a:xfrm>
             <a:off x="540000" y="1800000"/>
-            <a:ext cx="10661400" cy="3807720"/>
+            <a:ext cx="10661040" cy="3807720"/>
           </a:xfrm>
           <a:prstGeom prst="rect">
             <a:avLst/>
@@ -10863,7 +10921,7 @@
             <a:br>
               <a:rPr sz="2400"/>
             </a:br>
-            <a:endParaRPr b="0" lang="en-US" sz="2400" strike="noStrike" u="none">
+            <a:endParaRPr b="0" lang="fr-FR" sz="2400" strike="noStrike" u="none">
               <a:solidFill>
                 <a:srgbClr val="000000"/>
               </a:solidFill>
@@ -10911,7 +10969,7 @@
               </a:rPr>
               <a:t>:</a:t>
             </a:r>
-            <a:endParaRPr b="0" lang="en-US" sz="2400" strike="noStrike" u="none">
+            <a:endParaRPr b="0" lang="fr-FR" sz="2400" strike="noStrike" u="none">
               <a:solidFill>
                 <a:srgbClr val="000000"/>
               </a:solidFill>
@@ -10948,7 +11006,7 @@
               </a:rPr>
               <a:t>Raw data often lacks metadata (e.g., sample composition, instrument settings).</a:t>
             </a:r>
-            <a:endParaRPr b="0" lang="en-US" sz="2100" strike="noStrike" u="none">
+            <a:endParaRPr b="0" lang="fr-FR" sz="2100" strike="noStrike" u="none">
               <a:solidFill>
                 <a:srgbClr val="000000"/>
               </a:solidFill>
@@ -10999,7 +11057,7 @@
               </a:rPr>
               <a:t> </a:t>
             </a:r>
-            <a:endParaRPr b="0" lang="en-US" sz="2100" strike="noStrike" u="none">
+            <a:endParaRPr b="0" lang="fr-FR" sz="2100" strike="noStrike" u="none">
               <a:solidFill>
                 <a:srgbClr val="000000"/>
               </a:solidFill>
@@ -11047,7 +11105,7 @@
               </a:rPr>
               <a:t>:</a:t>
             </a:r>
-            <a:endParaRPr b="0" lang="en-US" sz="2400" strike="noStrike" u="none">
+            <a:endParaRPr b="0" lang="fr-FR" sz="2400" strike="noStrike" u="none">
               <a:solidFill>
                 <a:srgbClr val="000000"/>
               </a:solidFill>
@@ -11084,7 +11142,7 @@
               </a:rPr>
               <a:t>Publications describe experimental conditions, but formats vary widely.</a:t>
             </a:r>
-            <a:endParaRPr b="0" lang="en-US" sz="2100" strike="noStrike" u="none">
+            <a:endParaRPr b="0" lang="fr-FR" sz="2100" strike="noStrike" u="none">
               <a:solidFill>
                 <a:srgbClr val="000000"/>
               </a:solidFill>
@@ -11121,7 +11179,7 @@
               </a:rPr>
               <a:t>Not machine-readable or standardized for AI training.</a:t>
             </a:r>
-            <a:endParaRPr b="0" lang="en-US" sz="2100" strike="noStrike" u="none">
+            <a:endParaRPr b="0" lang="fr-FR" sz="2100" strike="noStrike" u="none">
               <a:solidFill>
                 <a:srgbClr val="000000"/>
               </a:solidFill>
@@ -11178,7 +11236,7 @@
         <p:spPr>
           <a:xfrm>
             <a:off x="548640" y="384120"/>
-            <a:ext cx="9142560" cy="291240"/>
+            <a:ext cx="9142200" cy="290880"/>
           </a:xfrm>
           <a:prstGeom prst="rect">
             <a:avLst/>
@@ -11218,7 +11276,7 @@
               </a:rPr>
               <a:t>Realistic datasets</a:t>
             </a:r>
-            <a:endParaRPr b="0" lang="en-US" sz="1200" strike="noStrike" u="none">
+            <a:endParaRPr b="0" lang="fr-FR" sz="1200" strike="noStrike" u="none">
               <a:solidFill>
                 <a:srgbClr val="000000"/>
               </a:solidFill>
@@ -11238,7 +11296,7 @@
         <p:spPr>
           <a:xfrm>
             <a:off x="548640" y="658440"/>
-            <a:ext cx="11062800" cy="821520"/>
+            <a:ext cx="11062440" cy="821160"/>
           </a:xfrm>
           <a:prstGeom prst="rect">
             <a:avLst/>
@@ -11284,7 +11342,7 @@
               </a:rPr>
               <a:t>Why Realistic AI Datasets?</a:t>
             </a:r>
-            <a:endParaRPr b="0" lang="en-US" sz="3000" strike="noStrike" u="none">
+            <a:endParaRPr b="0" lang="fr-FR" sz="3000" strike="noStrike" u="none">
               <a:solidFill>
                 <a:srgbClr val="000000"/>
               </a:solidFill>
@@ -11304,7 +11362,7 @@
         <p:spPr>
           <a:xfrm>
             <a:off x="11185920" y="6446520"/>
-            <a:ext cx="455760" cy="272880"/>
+            <a:ext cx="455400" cy="272520"/>
           </a:xfrm>
           <a:prstGeom prst="rect">
             <a:avLst/>
@@ -11345,7 +11403,7 @@
               </a:rPr>
               <a:t>2</a:t>
             </a:r>
-            <a:endParaRPr b="0" lang="en-US" sz="900" strike="noStrike" u="none">
+            <a:endParaRPr b="0" lang="fr-FR" sz="900" strike="noStrike" u="none">
               <a:solidFill>
                 <a:srgbClr val="000000"/>
               </a:solidFill>
@@ -11365,7 +11423,7 @@
         <p:spPr>
           <a:xfrm>
             <a:off x="540000" y="1800000"/>
-            <a:ext cx="9476640" cy="4661640"/>
+            <a:ext cx="9476280" cy="4660920"/>
           </a:xfrm>
           <a:prstGeom prst="rect">
             <a:avLst/>
@@ -11411,7 +11469,7 @@
             <a:br>
               <a:rPr sz="2400"/>
             </a:br>
-            <a:endParaRPr b="0" lang="en-US" sz="2400" strike="noStrike" u="none">
+            <a:endParaRPr b="0" lang="fr-FR" sz="2400" strike="noStrike" u="none">
               <a:solidFill>
                 <a:srgbClr val="000000"/>
               </a:solidFill>
@@ -11459,7 +11517,7 @@
               </a:rPr>
               <a:t>:</a:t>
             </a:r>
-            <a:endParaRPr b="0" lang="en-US" sz="2400" strike="noStrike" u="none">
+            <a:endParaRPr b="0" lang="fr-FR" sz="2400" strike="noStrike" u="none">
               <a:solidFill>
                 <a:srgbClr val="000000"/>
               </a:solidFill>
@@ -11496,7 +11554,7 @@
               </a:rPr>
               <a:t>Every input (e.g., sample thickness, detector angle) is known and adjustable.</a:t>
             </a:r>
-            <a:endParaRPr b="0" lang="en-US" sz="2100" strike="noStrike" u="none">
+            <a:endParaRPr b="0" lang="fr-FR" sz="2100" strike="noStrike" u="none">
               <a:solidFill>
                 <a:srgbClr val="000000"/>
               </a:solidFill>
@@ -11533,7 +11591,7 @@
               </a:rPr>
               <a:t>Outputs (e.g., scattering patterns, spectra) are directly linked to inputs.</a:t>
             </a:r>
-            <a:endParaRPr b="0" lang="en-US" sz="2100" strike="noStrike" u="none">
+            <a:endParaRPr b="0" lang="fr-FR" sz="2100" strike="noStrike" u="none">
               <a:solidFill>
                 <a:srgbClr val="000000"/>
               </a:solidFill>
@@ -11581,7 +11639,7 @@
               </a:rPr>
               <a:t>:</a:t>
             </a:r>
-            <a:endParaRPr b="0" lang="en-US" sz="2400" strike="noStrike" u="none">
+            <a:endParaRPr b="0" lang="fr-FR" sz="2400" strike="noStrike" u="none">
               <a:solidFill>
                 <a:srgbClr val="000000"/>
               </a:solidFill>
@@ -11602,7 +11660,7 @@
                 <a:tab algn="l" pos="0"/>
               </a:tabLst>
             </a:pPr>
-            <a:endParaRPr b="0" lang="en-US" sz="2400" strike="noStrike" u="none">
+            <a:endParaRPr b="0" lang="fr-FR" sz="2400" strike="noStrike" u="none">
               <a:solidFill>
                 <a:srgbClr val="000000"/>
               </a:solidFill>
@@ -11639,7 +11697,7 @@
               </a:rPr>
               <a:t>Parameters → [Simulation] → Virtual “Measurement”</a:t>
             </a:r>
-            <a:endParaRPr b="0" lang="en-US" sz="2100" strike="noStrike" u="none">
+            <a:endParaRPr b="0" lang="fr-FR" sz="2100" strike="noStrike" u="none">
               <a:solidFill>
                 <a:srgbClr val="000000"/>
               </a:solidFill>
@@ -11660,7 +11718,7 @@
                 <a:tab algn="l" pos="0"/>
               </a:tabLst>
             </a:pPr>
-            <a:endParaRPr b="0" lang="en-US" sz="2100" strike="noStrike" u="none">
+            <a:endParaRPr b="0" lang="fr-FR" sz="2100" strike="noStrike" u="none">
               <a:solidFill>
                 <a:srgbClr val="000000"/>
               </a:solidFill>
@@ -11708,7 +11766,7 @@
               </a:rPr>
               <a:t> </a:t>
             </a:r>
-            <a:endParaRPr b="0" lang="en-US" sz="2400" strike="noStrike" u="none">
+            <a:endParaRPr b="0" lang="fr-FR" sz="2400" strike="noStrike" u="none">
               <a:solidFill>
                 <a:srgbClr val="000000"/>
               </a:solidFill>
@@ -11765,7 +11823,7 @@
         <p:spPr>
           <a:xfrm>
             <a:off x="548640" y="384120"/>
-            <a:ext cx="9142560" cy="291240"/>
+            <a:ext cx="9142200" cy="290880"/>
           </a:xfrm>
           <a:prstGeom prst="rect">
             <a:avLst/>
@@ -11805,7 +11863,7 @@
               </a:rPr>
               <a:t>Realistic datasets</a:t>
             </a:r>
-            <a:endParaRPr b="0" lang="en-US" sz="1200" strike="noStrike" u="none">
+            <a:endParaRPr b="0" lang="fr-FR" sz="1200" strike="noStrike" u="none">
               <a:solidFill>
                 <a:srgbClr val="000000"/>
               </a:solidFill>
@@ -11825,7 +11883,7 @@
         <p:spPr>
           <a:xfrm>
             <a:off x="548640" y="658440"/>
-            <a:ext cx="11062800" cy="821520"/>
+            <a:ext cx="11062440" cy="821160"/>
           </a:xfrm>
           <a:prstGeom prst="rect">
             <a:avLst/>
@@ -11871,7 +11929,7 @@
               </a:rPr>
               <a:t>Why Realistic AI Datasets?</a:t>
             </a:r>
-            <a:endParaRPr b="0" lang="en-US" sz="3000" strike="noStrike" u="none">
+            <a:endParaRPr b="0" lang="fr-FR" sz="3000" strike="noStrike" u="none">
               <a:solidFill>
                 <a:srgbClr val="000000"/>
               </a:solidFill>
@@ -11891,7 +11949,7 @@
         <p:spPr>
           <a:xfrm>
             <a:off x="11185920" y="6446520"/>
-            <a:ext cx="455760" cy="272880"/>
+            <a:ext cx="455400" cy="272520"/>
           </a:xfrm>
           <a:prstGeom prst="rect">
             <a:avLst/>
@@ -11932,7 +11990,7 @@
               </a:rPr>
               <a:t>2</a:t>
             </a:r>
-            <a:endParaRPr b="0" lang="en-US" sz="900" strike="noStrike" u="none">
+            <a:endParaRPr b="0" lang="fr-FR" sz="900" strike="noStrike" u="none">
               <a:solidFill>
                 <a:srgbClr val="000000"/>
               </a:solidFill>
@@ -11952,7 +12010,7 @@
         <p:spPr>
           <a:xfrm>
             <a:off x="540000" y="1800000"/>
-            <a:ext cx="9476640" cy="3525840"/>
+            <a:ext cx="9476280" cy="3525840"/>
           </a:xfrm>
           <a:prstGeom prst="rect">
             <a:avLst/>
@@ -12009,7 +12067,7 @@
             <a:br>
               <a:rPr sz="2400"/>
             </a:br>
-            <a:endParaRPr b="0" lang="en-US" sz="2400" strike="noStrike" u="none">
+            <a:endParaRPr b="0" lang="fr-FR" sz="2400" strike="noStrike" u="none">
               <a:solidFill>
                 <a:srgbClr val="000000"/>
               </a:solidFill>
@@ -12057,7 +12115,7 @@
               </a:rPr>
               <a:t>: Reconstruct input parameters from measured data.</a:t>
             </a:r>
-            <a:endParaRPr b="0" lang="en-US" sz="2400" strike="noStrike" u="none">
+            <a:endParaRPr b="0" lang="fr-FR" sz="2400" strike="noStrike" u="none">
               <a:solidFill>
                 <a:srgbClr val="000000"/>
               </a:solidFill>
@@ -12119,7 +12177,7 @@
               </a:rPr>
               <a:t> </a:t>
             </a:r>
-            <a:endParaRPr b="0" lang="en-US" sz="2400" strike="noStrike" u="none">
+            <a:endParaRPr b="0" lang="fr-FR" sz="2400" strike="noStrike" u="none">
               <a:solidFill>
                 <a:srgbClr val="000000"/>
               </a:solidFill>
@@ -12154,7 +12212,7 @@
             <a:br>
               <a:rPr sz="2100"/>
             </a:br>
-            <a:endParaRPr b="0" lang="en-US" sz="2100" strike="noStrike" u="none">
+            <a:endParaRPr b="0" lang="fr-FR" sz="2100" strike="noStrike" u="none">
               <a:solidFill>
                 <a:srgbClr val="000000"/>
               </a:solidFill>
@@ -12191,7 +12249,7 @@
               </a:rPr>
               <a:t>Example: Predict sample composition from a scattering pattern.</a:t>
             </a:r>
-            <a:endParaRPr b="0" lang="en-US" sz="2400" strike="noStrike" u="none">
+            <a:endParaRPr b="0" lang="fr-FR" sz="2400" strike="noStrike" u="none">
               <a:solidFill>
                 <a:srgbClr val="000000"/>
               </a:solidFill>
@@ -12248,7 +12306,7 @@
         <p:spPr>
           <a:xfrm>
             <a:off x="548640" y="384120"/>
-            <a:ext cx="9142560" cy="291240"/>
+            <a:ext cx="9142200" cy="290880"/>
           </a:xfrm>
           <a:prstGeom prst="rect">
             <a:avLst/>
@@ -12288,7 +12346,7 @@
               </a:rPr>
               <a:t>Realistic datasets</a:t>
             </a:r>
-            <a:endParaRPr b="0" lang="en-US" sz="1200" strike="noStrike" u="none">
+            <a:endParaRPr b="0" lang="fr-FR" sz="1200" strike="noStrike" u="none">
               <a:solidFill>
                 <a:srgbClr val="000000"/>
               </a:solidFill>
@@ -12308,7 +12366,7 @@
         <p:spPr>
           <a:xfrm>
             <a:off x="548640" y="658440"/>
-            <a:ext cx="11062800" cy="821520"/>
+            <a:ext cx="11062440" cy="821160"/>
           </a:xfrm>
           <a:prstGeom prst="rect">
             <a:avLst/>
@@ -12354,7 +12412,7 @@
               </a:rPr>
               <a:t>Why Realistic AI Datasets?</a:t>
             </a:r>
-            <a:endParaRPr b="0" lang="en-US" sz="3000" strike="noStrike" u="none">
+            <a:endParaRPr b="0" lang="fr-FR" sz="3000" strike="noStrike" u="none">
               <a:solidFill>
                 <a:srgbClr val="000000"/>
               </a:solidFill>
@@ -12374,7 +12432,7 @@
         <p:spPr>
           <a:xfrm>
             <a:off x="11185920" y="6446520"/>
-            <a:ext cx="455760" cy="272880"/>
+            <a:ext cx="455400" cy="272520"/>
           </a:xfrm>
           <a:prstGeom prst="rect">
             <a:avLst/>
@@ -12415,7 +12473,7 @@
               </a:rPr>
               <a:t>2</a:t>
             </a:r>
-            <a:endParaRPr b="0" lang="en-US" sz="900" strike="noStrike" u="none">
+            <a:endParaRPr b="0" lang="fr-FR" sz="900" strike="noStrike" u="none">
               <a:solidFill>
                 <a:srgbClr val="000000"/>
               </a:solidFill>
@@ -12435,7 +12493,7 @@
         <p:spPr>
           <a:xfrm>
             <a:off x="540000" y="1800000"/>
-            <a:ext cx="10979280" cy="3160080"/>
+            <a:ext cx="10978920" cy="3160080"/>
           </a:xfrm>
           <a:prstGeom prst="rect">
             <a:avLst/>
@@ -12492,7 +12550,7 @@
             <a:br>
               <a:rPr sz="2400"/>
             </a:br>
-            <a:endParaRPr b="0" lang="en-US" sz="2400" strike="noStrike" u="none">
+            <a:endParaRPr b="0" lang="fr-FR" sz="2400" strike="noStrike" u="none">
               <a:solidFill>
                 <a:srgbClr val="000000"/>
               </a:solidFill>
@@ -12540,7 +12598,7 @@
               </a:rPr>
               <a:t>: Replace slow simulations with fast AI models.</a:t>
             </a:r>
-            <a:endParaRPr b="0" lang="en-US" sz="2400" strike="noStrike" u="none">
+            <a:endParaRPr b="0" lang="fr-FR" sz="2400" strike="noStrike" u="none">
               <a:solidFill>
                 <a:srgbClr val="000000"/>
               </a:solidFill>
@@ -12602,7 +12660,7 @@
               </a:rPr>
               <a:t> </a:t>
             </a:r>
-            <a:endParaRPr b="0" lang="en-US" sz="2400" strike="noStrike" u="none">
+            <a:endParaRPr b="0" lang="fr-FR" sz="2400" strike="noStrike" u="none">
               <a:solidFill>
                 <a:srgbClr val="000000"/>
               </a:solidFill>
@@ -12637,7 +12695,7 @@
             <a:br>
               <a:rPr sz="2100"/>
             </a:br>
-            <a:endParaRPr b="0" lang="en-US" sz="2100" strike="noStrike" u="none">
+            <a:endParaRPr b="0" lang="fr-FR" sz="2100" strike="noStrike" u="none">
               <a:solidFill>
                 <a:srgbClr val="000000"/>
               </a:solidFill>
@@ -12685,7 +12743,7 @@
               </a:rPr>
               <a:t>: Fast phase-space exploration.</a:t>
             </a:r>
-            <a:endParaRPr b="0" lang="en-US" sz="2400" strike="noStrike" u="none">
+            <a:endParaRPr b="0" lang="fr-FR" sz="2400" strike="noStrike" u="none">
               <a:solidFill>
                 <a:srgbClr val="000000"/>
               </a:solidFill>
@@ -12742,7 +12800,7 @@
         <p:spPr>
           <a:xfrm>
             <a:off x="548640" y="384120"/>
-            <a:ext cx="9142560" cy="291240"/>
+            <a:ext cx="9142200" cy="290880"/>
           </a:xfrm>
           <a:prstGeom prst="rect">
             <a:avLst/>
@@ -12782,7 +12840,7 @@
               </a:rPr>
               <a:t>Realistic datasets</a:t>
             </a:r>
-            <a:endParaRPr b="0" lang="en-US" sz="1200" strike="noStrike" u="none">
+            <a:endParaRPr b="0" lang="fr-FR" sz="1200" strike="noStrike" u="none">
               <a:solidFill>
                 <a:srgbClr val="000000"/>
               </a:solidFill>
@@ -12802,7 +12860,7 @@
         <p:spPr>
           <a:xfrm>
             <a:off x="548640" y="658440"/>
-            <a:ext cx="11062800" cy="821520"/>
+            <a:ext cx="11062440" cy="821160"/>
           </a:xfrm>
           <a:prstGeom prst="rect">
             <a:avLst/>
@@ -12848,7 +12906,7 @@
               </a:rPr>
               <a:t>Why Realistic AI Datasets?</a:t>
             </a:r>
-            <a:endParaRPr b="0" lang="en-US" sz="3000" strike="noStrike" u="none">
+            <a:endParaRPr b="0" lang="fr-FR" sz="3000" strike="noStrike" u="none">
               <a:solidFill>
                 <a:srgbClr val="000000"/>
               </a:solidFill>
@@ -12868,7 +12926,7 @@
         <p:spPr>
           <a:xfrm>
             <a:off x="11185920" y="6446520"/>
-            <a:ext cx="455760" cy="272880"/>
+            <a:ext cx="455400" cy="272520"/>
           </a:xfrm>
           <a:prstGeom prst="rect">
             <a:avLst/>
@@ -12909,7 +12967,7 @@
               </a:rPr>
               <a:t>2</a:t>
             </a:r>
-            <a:endParaRPr b="0" lang="en-US" sz="900" strike="noStrike" u="none">
+            <a:endParaRPr b="0" lang="fr-FR" sz="900" strike="noStrike" u="none">
               <a:solidFill>
                 <a:srgbClr val="000000"/>
               </a:solidFill>
@@ -12929,7 +12987,7 @@
         <p:spPr>
           <a:xfrm>
             <a:off x="540000" y="1800000"/>
-            <a:ext cx="10979280" cy="3160080"/>
+            <a:ext cx="10978920" cy="3160080"/>
           </a:xfrm>
           <a:prstGeom prst="rect">
             <a:avLst/>
@@ -12986,7 +13044,7 @@
             <a:br>
               <a:rPr sz="2400"/>
             </a:br>
-            <a:endParaRPr b="0" lang="en-US" sz="2400" strike="noStrike" u="none">
+            <a:endParaRPr b="0" lang="fr-FR" sz="2400" strike="noStrike" u="none">
               <a:solidFill>
                 <a:srgbClr val="000000"/>
               </a:solidFill>
@@ -13034,7 +13092,7 @@
               </a:rPr>
               <a:t>: Find best parameters to get min/max signal.</a:t>
             </a:r>
-            <a:endParaRPr b="0" lang="en-US" sz="2400" strike="noStrike" u="none">
+            <a:endParaRPr b="0" lang="fr-FR" sz="2400" strike="noStrike" u="none">
               <a:solidFill>
                 <a:srgbClr val="000000"/>
               </a:solidFill>
@@ -13096,7 +13154,7 @@
               </a:rPr>
               <a:t> </a:t>
             </a:r>
-            <a:endParaRPr b="0" lang="en-US" sz="2400" strike="noStrike" u="none">
+            <a:endParaRPr b="0" lang="fr-FR" sz="2400" strike="noStrike" u="none">
               <a:solidFill>
                 <a:srgbClr val="000000"/>
               </a:solidFill>
@@ -13131,7 +13189,7 @@
             <a:br>
               <a:rPr sz="2100"/>
             </a:br>
-            <a:endParaRPr b="0" lang="en-US" sz="2100" strike="noStrike" u="none">
+            <a:endParaRPr b="0" lang="fr-FR" sz="2100" strike="noStrike" u="none">
               <a:solidFill>
                 <a:srgbClr val="000000"/>
               </a:solidFill>
@@ -13179,7 +13237,7 @@
               </a:rPr>
               <a:t>: Optimization of beamline configurations.</a:t>
             </a:r>
-            <a:endParaRPr b="0" lang="en-US" sz="2400" strike="noStrike" u="none">
+            <a:endParaRPr b="0" lang="fr-FR" sz="2400" strike="noStrike" u="none">
               <a:solidFill>
                 <a:srgbClr val="000000"/>
               </a:solidFill>
